--- a/evidence-room/04_AP_AGENT_OS_TEAM/Decks/ER_CFO_AP_Transformation.pptx
+++ b/evidence-room/04_AP_AGENT_OS_TEAM/Decks/ER_CFO_AP_Transformation.pptx
@@ -11,6 +11,11 @@
     <p:sldId id="259" r:id="rId10"/>
     <p:sldId id="260" r:id="rId11"/>
     <p:sldId id="261" r:id="rId12"/>
+    <p:sldId id="262" r:id="rId13"/>
+    <p:sldId id="263" r:id="rId14"/>
+    <p:sldId id="264" r:id="rId15"/>
+    <p:sldId id="265" r:id="rId16"/>
+    <p:sldId id="266" r:id="rId17"/>
   </p:sldIdLst>
   <p:sldSz cx="9144000" cy="6858000" type="screen4x3"/>
   <p:notesSz cx="6858000" cy="9144000"/>
@@ -3095,20 +3100,198 @@
       <p:grpSpPr/>
       <p:sp>
         <p:nvSpPr>
-          <p:cNvPr id="2" name="Title 1"/>
-          <p:cNvSpPr>
-            <a:spLocks noGrp="1"/>
-          </p:cNvSpPr>
-          <p:nvPr>
-            <p:ph type="ctrTitle"/>
-          </p:nvPr>
-        </p:nvSpPr>
-        <p:spPr/>
-        <p:txBody>
-          <a:bodyPr/>
-          <a:lstStyle/>
-          <a:p>
-            <a:r>
+          <p:cNvPr id="2" name="Rectangle 1"/>
+          <p:cNvSpPr/>
+          <p:nvPr/>
+        </p:nvSpPr>
+        <p:spPr>
+          <a:xfrm>
+            <a:off x="0" y="0"/>
+            <a:ext cx="9144000" cy="6858000"/>
+          </a:xfrm>
+          <a:prstGeom prst="rect">
+            <a:avLst/>
+          </a:prstGeom>
+          <a:solidFill>
+            <a:srgbClr val="F3EEE4"/>
+          </a:solidFill>
+          <a:ln>
+            <a:noFill/>
+          </a:ln>
+        </p:spPr>
+        <p:style>
+          <a:lnRef idx="1">
+            <a:schemeClr val="accent1"/>
+          </a:lnRef>
+          <a:fillRef idx="3">
+            <a:schemeClr val="accent1"/>
+          </a:fillRef>
+          <a:effectRef idx="2">
+            <a:schemeClr val="accent1"/>
+          </a:effectRef>
+          <a:fontRef idx="minor">
+            <a:schemeClr val="lt1"/>
+          </a:fontRef>
+        </p:style>
+        <p:txBody>
+          <a:bodyPr rtlCol="0" anchor="ctr"/>
+          <a:lstStyle/>
+          <a:p>
+            <a:pPr algn="ctr"/>
+          </a:p>
+        </p:txBody>
+      </p:sp>
+      <p:sp>
+        <p:nvSpPr>
+          <p:cNvPr id="3" name="Rectangle 2"/>
+          <p:cNvSpPr/>
+          <p:nvPr/>
+        </p:nvSpPr>
+        <p:spPr>
+          <a:xfrm>
+            <a:off x="457200" y="640080"/>
+            <a:ext cx="347472" cy="347472"/>
+          </a:xfrm>
+          <a:prstGeom prst="rect">
+            <a:avLst/>
+          </a:prstGeom>
+          <a:solidFill>
+            <a:srgbClr val="F3EEE4"/>
+          </a:solidFill>
+          <a:ln>
+            <a:noFill/>
+          </a:ln>
+        </p:spPr>
+        <p:style>
+          <a:lnRef idx="1">
+            <a:schemeClr val="accent1"/>
+          </a:lnRef>
+          <a:fillRef idx="3">
+            <a:schemeClr val="accent1"/>
+          </a:fillRef>
+          <a:effectRef idx="2">
+            <a:schemeClr val="accent1"/>
+          </a:effectRef>
+          <a:fontRef idx="minor">
+            <a:schemeClr val="lt1"/>
+          </a:fontRef>
+        </p:style>
+        <p:txBody>
+          <a:bodyPr rtlCol="0" anchor="ctr"/>
+          <a:lstStyle/>
+          <a:p>
+            <a:pPr algn="ctr"/>
+          </a:p>
+        </p:txBody>
+      </p:sp>
+      <p:sp>
+        <p:nvSpPr>
+          <p:cNvPr id="4" name="Rectangle 3"/>
+          <p:cNvSpPr/>
+          <p:nvPr/>
+        </p:nvSpPr>
+        <p:spPr>
+          <a:xfrm>
+            <a:off x="457200" y="640080"/>
+            <a:ext cx="347472" cy="347472"/>
+          </a:xfrm>
+          <a:prstGeom prst="rect">
+            <a:avLst/>
+          </a:prstGeom>
+          <a:noFill/>
+          <a:ln w="12700">
+            <a:solidFill>
+              <a:srgbClr val="B0893E"/>
+            </a:solidFill>
+          </a:ln>
+        </p:spPr>
+        <p:style>
+          <a:lnRef idx="1">
+            <a:schemeClr val="accent1"/>
+          </a:lnRef>
+          <a:fillRef idx="3">
+            <a:schemeClr val="accent1"/>
+          </a:fillRef>
+          <a:effectRef idx="2">
+            <a:schemeClr val="accent1"/>
+          </a:effectRef>
+          <a:fontRef idx="minor">
+            <a:schemeClr val="lt1"/>
+          </a:fontRef>
+        </p:style>
+        <p:txBody>
+          <a:bodyPr rtlCol="0" anchor="ctr"/>
+          <a:lstStyle/>
+          <a:p>
+            <a:pPr algn="ctr"/>
+          </a:p>
+        </p:txBody>
+      </p:sp>
+      <p:sp>
+        <p:nvSpPr>
+          <p:cNvPr id="5" name="TextBox 4"/>
+          <p:cNvSpPr txBox="1"/>
+          <p:nvPr/>
+        </p:nvSpPr>
+        <p:spPr>
+          <a:xfrm>
+            <a:off x="457200" y="1280160"/>
+            <a:ext cx="8229600" cy="320040"/>
+          </a:xfrm>
+          <a:prstGeom prst="rect">
+            <a:avLst/>
+          </a:prstGeom>
+          <a:noFill/>
+        </p:spPr>
+        <p:txBody>
+          <a:bodyPr wrap="square">
+            <a:spAutoFit/>
+          </a:bodyPr>
+          <a:lstStyle/>
+          <a:p>
+            <a:pPr algn="l"/>
+            <a:r>
+              <a:rPr sz="1200" b="1">
+                <a:solidFill>
+                  <a:srgbClr val="B0893E"/>
+                </a:solidFill>
+                <a:latin typeface="Calibri"/>
+              </a:rPr>
+              <a:t>CFO / CONTROLLER BRIEFING</a:t>
+            </a:r>
+          </a:p>
+        </p:txBody>
+      </p:sp>
+      <p:sp>
+        <p:nvSpPr>
+          <p:cNvPr id="6" name="TextBox 5"/>
+          <p:cNvSpPr txBox="1"/>
+          <p:nvPr/>
+        </p:nvSpPr>
+        <p:spPr>
+          <a:xfrm>
+            <a:off x="457200" y="1737360"/>
+            <a:ext cx="8229600" cy="2011680"/>
+          </a:xfrm>
+          <a:prstGeom prst="rect">
+            <a:avLst/>
+          </a:prstGeom>
+          <a:noFill/>
+        </p:spPr>
+        <p:txBody>
+          <a:bodyPr wrap="square">
+            <a:spAutoFit/>
+          </a:bodyPr>
+          <a:lstStyle/>
+          <a:p>
+            <a:pPr algn="l"/>
+            <a:r>
+              <a:rPr sz="3600" b="0">
+                <a:solidFill>
+                  <a:srgbClr val="12160F"/>
+                </a:solidFill>
+                <a:latin typeface="Georgia"/>
+              </a:rPr>
               <a:t>Proof before permission.</a:t>
             </a:r>
           </a:p>
@@ -3116,26 +3299,624 @@
       </p:sp>
       <p:sp>
         <p:nvSpPr>
-          <p:cNvPr id="3" name="Subtitle 2"/>
-          <p:cNvSpPr>
-            <a:spLocks noGrp="1"/>
-          </p:cNvSpPr>
-          <p:nvPr>
-            <p:ph type="subTitle" idx="1"/>
-          </p:nvPr>
-        </p:nvSpPr>
-        <p:spPr/>
-        <p:txBody>
-          <a:bodyPr/>
-          <a:lstStyle/>
-          <a:p>
-            <a:r>
-              <a:t>EVIDENCE ROOM — AP AGENT OS</a:t>
-            </a:r>
-          </a:p>
-          <a:p>
-            <a:r>
-              <a:t>CFO / Controller briefing · working draft · not a forecast</a:t>
+          <p:cNvPr id="7" name="TextBox 6"/>
+          <p:cNvSpPr txBox="1"/>
+          <p:nvPr/>
+        </p:nvSpPr>
+        <p:spPr>
+          <a:xfrm>
+            <a:off x="457200" y="4023360"/>
+            <a:ext cx="7772400" cy="1097280"/>
+          </a:xfrm>
+          <a:prstGeom prst="rect">
+            <a:avLst/>
+          </a:prstGeom>
+          <a:noFill/>
+        </p:spPr>
+        <p:txBody>
+          <a:bodyPr wrap="square">
+            <a:spAutoFit/>
+          </a:bodyPr>
+          <a:lstStyle/>
+          <a:p>
+            <a:pPr algn="l"/>
+            <a:r>
+              <a:rPr sz="1600" b="0">
+                <a:solidFill>
+                  <a:srgbClr val="5A6154"/>
+                </a:solidFill>
+                <a:latin typeface="Calibri"/>
+              </a:rPr>
+              <a:t>How to put AI on accounts payable without unofficial permission, a second ERP, or a payment robot.</a:t>
+            </a:r>
+          </a:p>
+        </p:txBody>
+      </p:sp>
+      <p:sp>
+        <p:nvSpPr>
+          <p:cNvPr id="8" name="TextBox 7"/>
+          <p:cNvSpPr txBox="1"/>
+          <p:nvPr/>
+        </p:nvSpPr>
+        <p:spPr>
+          <a:xfrm>
+            <a:off x="457200" y="6217920"/>
+            <a:ext cx="8229600" cy="274320"/>
+          </a:xfrm>
+          <a:prstGeom prst="rect">
+            <a:avLst/>
+          </a:prstGeom>
+          <a:noFill/>
+        </p:spPr>
+        <p:txBody>
+          <a:bodyPr wrap="square">
+            <a:spAutoFit/>
+          </a:bodyPr>
+          <a:lstStyle/>
+          <a:p>
+            <a:pPr algn="l"/>
+            <a:r>
+              <a:rPr sz="1100" b="0">
+                <a:solidFill>
+                  <a:srgbClr val="5A6154"/>
+                </a:solidFill>
+                <a:latin typeface="Calibri"/>
+              </a:rPr>
+              <a:t>Proof before permission.  ·  Working draft. Not a forecast.</a:t>
+            </a:r>
+          </a:p>
+        </p:txBody>
+      </p:sp>
+    </p:spTree>
+  </p:cSld>
+  <p:clrMapOvr>
+    <a:masterClrMapping/>
+  </p:clrMapOvr>
+</p:sld>
+</file>
+
+<file path=ppt/slides/slide10.xml><?xml version="1.0" encoding="utf-8"?>
+<p:sld xmlns:a="http://schemas.openxmlformats.org/drawingml/2006/main" xmlns:p="http://schemas.openxmlformats.org/presentationml/2006/main" xmlns:r="http://schemas.openxmlformats.org/officeDocument/2006/relationships">
+  <p:cSld>
+    <p:spTree>
+      <p:nvGrpSpPr>
+        <p:cNvPr id="1" name=""/>
+        <p:cNvGrpSpPr/>
+        <p:nvPr/>
+      </p:nvGrpSpPr>
+      <p:grpSpPr/>
+      <p:sp>
+        <p:nvSpPr>
+          <p:cNvPr id="2" name="Rectangle 1"/>
+          <p:cNvSpPr/>
+          <p:nvPr/>
+        </p:nvSpPr>
+        <p:spPr>
+          <a:xfrm>
+            <a:off x="0" y="0"/>
+            <a:ext cx="9144000" cy="6858000"/>
+          </a:xfrm>
+          <a:prstGeom prst="rect">
+            <a:avLst/>
+          </a:prstGeom>
+          <a:solidFill>
+            <a:srgbClr val="F3EEE4"/>
+          </a:solidFill>
+          <a:ln>
+            <a:noFill/>
+          </a:ln>
+        </p:spPr>
+        <p:style>
+          <a:lnRef idx="1">
+            <a:schemeClr val="accent1"/>
+          </a:lnRef>
+          <a:fillRef idx="3">
+            <a:schemeClr val="accent1"/>
+          </a:fillRef>
+          <a:effectRef idx="2">
+            <a:schemeClr val="accent1"/>
+          </a:effectRef>
+          <a:fontRef idx="minor">
+            <a:schemeClr val="lt1"/>
+          </a:fontRef>
+        </p:style>
+        <p:txBody>
+          <a:bodyPr rtlCol="0" anchor="ctr"/>
+          <a:lstStyle/>
+          <a:p>
+            <a:pPr algn="ctr"/>
+          </a:p>
+        </p:txBody>
+      </p:sp>
+      <p:sp>
+        <p:nvSpPr>
+          <p:cNvPr id="3" name="Rectangle 2"/>
+          <p:cNvSpPr/>
+          <p:nvPr/>
+        </p:nvSpPr>
+        <p:spPr>
+          <a:xfrm>
+            <a:off x="0" y="0"/>
+            <a:ext cx="73152" cy="6858000"/>
+          </a:xfrm>
+          <a:prstGeom prst="rect">
+            <a:avLst/>
+          </a:prstGeom>
+          <a:solidFill>
+            <a:srgbClr val="B0893E"/>
+          </a:solidFill>
+          <a:ln>
+            <a:noFill/>
+          </a:ln>
+        </p:spPr>
+        <p:style>
+          <a:lnRef idx="1">
+            <a:schemeClr val="accent1"/>
+          </a:lnRef>
+          <a:fillRef idx="3">
+            <a:schemeClr val="accent1"/>
+          </a:fillRef>
+          <a:effectRef idx="2">
+            <a:schemeClr val="accent1"/>
+          </a:effectRef>
+          <a:fontRef idx="minor">
+            <a:schemeClr val="lt1"/>
+          </a:fontRef>
+        </p:style>
+        <p:txBody>
+          <a:bodyPr rtlCol="0" anchor="ctr"/>
+          <a:lstStyle/>
+          <a:p>
+            <a:pPr algn="ctr"/>
+          </a:p>
+        </p:txBody>
+      </p:sp>
+      <p:sp>
+        <p:nvSpPr>
+          <p:cNvPr id="4" name="TextBox 3"/>
+          <p:cNvSpPr txBox="1"/>
+          <p:nvPr/>
+        </p:nvSpPr>
+        <p:spPr>
+          <a:xfrm>
+            <a:off x="365760" y="164592"/>
+            <a:ext cx="8412480" cy="256032"/>
+          </a:xfrm>
+          <a:prstGeom prst="rect">
+            <a:avLst/>
+          </a:prstGeom>
+          <a:noFill/>
+        </p:spPr>
+        <p:txBody>
+          <a:bodyPr wrap="square">
+            <a:spAutoFit/>
+          </a:bodyPr>
+          <a:lstStyle/>
+          <a:p>
+            <a:pPr algn="l"/>
+            <a:r>
+              <a:rPr sz="1000" b="0">
+                <a:solidFill>
+                  <a:srgbClr val="B0893E"/>
+                </a:solidFill>
+                <a:latin typeface="Calibri"/>
+              </a:rPr>
+              <a:t>EVIDENCE ROOM — AP AGENT OS   ·   Monday</a:t>
+            </a:r>
+          </a:p>
+        </p:txBody>
+      </p:sp>
+      <p:sp>
+        <p:nvSpPr>
+          <p:cNvPr id="5" name="TextBox 4"/>
+          <p:cNvSpPr txBox="1"/>
+          <p:nvPr/>
+        </p:nvSpPr>
+        <p:spPr>
+          <a:xfrm>
+            <a:off x="365760" y="502920"/>
+            <a:ext cx="8412480" cy="731520"/>
+          </a:xfrm>
+          <a:prstGeom prst="rect">
+            <a:avLst/>
+          </a:prstGeom>
+          <a:noFill/>
+        </p:spPr>
+        <p:txBody>
+          <a:bodyPr wrap="square">
+            <a:spAutoFit/>
+          </a:bodyPr>
+          <a:lstStyle/>
+          <a:p>
+            <a:pPr algn="l"/>
+            <a:r>
+              <a:rPr sz="2600" b="0">
+                <a:solidFill>
+                  <a:srgbClr val="12160F"/>
+                </a:solidFill>
+                <a:latin typeface="Georgia"/>
+              </a:rPr>
+              <a:t>What we will have done in two weeks if we start</a:t>
+            </a:r>
+          </a:p>
+        </p:txBody>
+      </p:sp>
+      <p:sp>
+        <p:nvSpPr>
+          <p:cNvPr id="6" name="TextBox 5"/>
+          <p:cNvSpPr txBox="1"/>
+          <p:nvPr/>
+        </p:nvSpPr>
+        <p:spPr>
+          <a:xfrm>
+            <a:off x="365760" y="1371600"/>
+            <a:ext cx="8321040" cy="4937760"/>
+          </a:xfrm>
+          <a:prstGeom prst="rect">
+            <a:avLst/>
+          </a:prstGeom>
+          <a:noFill/>
+        </p:spPr>
+        <p:txBody>
+          <a:bodyPr wrap="square">
+            <a:spAutoFit/>
+          </a:bodyPr>
+          <a:lstStyle/>
+          <a:p>
+            <a:pPr>
+              <a:spcAft>
+                <a:spcPts val="800"/>
+              </a:spcAft>
+            </a:pPr>
+            <a:r>
+              <a:rPr sz="1600">
+                <a:solidFill>
+                  <a:srgbClr val="12160F"/>
+                </a:solidFill>
+                <a:latin typeface="Calibri"/>
+              </a:rPr>
+              <a:t>·  Diagnostic scored. Vetoes honoured.</a:t>
+            </a:r>
+          </a:p>
+          <a:p>
+            <a:pPr>
+              <a:spcAft>
+                <a:spcPts val="800"/>
+              </a:spcAft>
+            </a:pPr>
+            <a:r>
+              <a:rPr sz="1600">
+                <a:solidFill>
+                  <a:srgbClr val="12160F"/>
+                </a:solidFill>
+                <a:latin typeface="Calibri"/>
+              </a:rPr>
+              <a:t>·  One path mapped. Exception codes from the closed list.</a:t>
+            </a:r>
+          </a:p>
+          <a:p>
+            <a:pPr>
+              <a:spcAft>
+                <a:spcPts val="800"/>
+              </a:spcAft>
+            </a:pPr>
+            <a:r>
+              <a:rPr sz="1600">
+                <a:solidFill>
+                  <a:srgbClr val="12160F"/>
+                </a:solidFill>
+                <a:latin typeface="Calibri"/>
+              </a:rPr>
+              <a:t>·  Six Wave 1 charters with named owners or VACANT.</a:t>
+            </a:r>
+          </a:p>
+          <a:p>
+            <a:pPr>
+              <a:spcAft>
+                <a:spcPts val="800"/>
+              </a:spcAft>
+            </a:pPr>
+            <a:r>
+              <a:rPr sz="1600">
+                <a:solidFill>
+                  <a:srgbClr val="12160F"/>
+                </a:solidFill>
+                <a:latin typeface="Calibri"/>
+              </a:rPr>
+              <a:t>·  Shadow design: coverage, sample, language, rollback.</a:t>
+            </a:r>
+          </a:p>
+          <a:p>
+            <a:pPr>
+              <a:spcAft>
+                <a:spcPts val="800"/>
+              </a:spcAft>
+            </a:pPr>
+            <a:r>
+              <a:rPr sz="1600">
+                <a:solidFill>
+                  <a:srgbClr val="12160F"/>
+                </a:solidFill>
+                <a:latin typeface="Calibri"/>
+              </a:rPr>
+              <a:t>·  Steering date. No unofficial copilots on payment.</a:t>
+            </a:r>
+          </a:p>
+        </p:txBody>
+      </p:sp>
+    </p:spTree>
+  </p:cSld>
+  <p:clrMapOvr>
+    <a:masterClrMapping/>
+  </p:clrMapOvr>
+</p:sld>
+</file>
+
+<file path=ppt/slides/slide11.xml><?xml version="1.0" encoding="utf-8"?>
+<p:sld xmlns:a="http://schemas.openxmlformats.org/drawingml/2006/main" xmlns:p="http://schemas.openxmlformats.org/presentationml/2006/main" xmlns:r="http://schemas.openxmlformats.org/officeDocument/2006/relationships">
+  <p:cSld>
+    <p:spTree>
+      <p:nvGrpSpPr>
+        <p:cNvPr id="1" name=""/>
+        <p:cNvGrpSpPr/>
+        <p:nvPr/>
+      </p:nvGrpSpPr>
+      <p:grpSpPr/>
+      <p:sp>
+        <p:nvSpPr>
+          <p:cNvPr id="2" name="Rectangle 1"/>
+          <p:cNvSpPr/>
+          <p:nvPr/>
+        </p:nvSpPr>
+        <p:spPr>
+          <a:xfrm>
+            <a:off x="0" y="0"/>
+            <a:ext cx="9144000" cy="6858000"/>
+          </a:xfrm>
+          <a:prstGeom prst="rect">
+            <a:avLst/>
+          </a:prstGeom>
+          <a:solidFill>
+            <a:srgbClr val="F3EEE4"/>
+          </a:solidFill>
+          <a:ln>
+            <a:noFill/>
+          </a:ln>
+        </p:spPr>
+        <p:style>
+          <a:lnRef idx="1">
+            <a:schemeClr val="accent1"/>
+          </a:lnRef>
+          <a:fillRef idx="3">
+            <a:schemeClr val="accent1"/>
+          </a:fillRef>
+          <a:effectRef idx="2">
+            <a:schemeClr val="accent1"/>
+          </a:effectRef>
+          <a:fontRef idx="minor">
+            <a:schemeClr val="lt1"/>
+          </a:fontRef>
+        </p:style>
+        <p:txBody>
+          <a:bodyPr rtlCol="0" anchor="ctr"/>
+          <a:lstStyle/>
+          <a:p>
+            <a:pPr algn="ctr"/>
+          </a:p>
+        </p:txBody>
+      </p:sp>
+      <p:sp>
+        <p:nvSpPr>
+          <p:cNvPr id="3" name="Rectangle 2"/>
+          <p:cNvSpPr/>
+          <p:nvPr/>
+        </p:nvSpPr>
+        <p:spPr>
+          <a:xfrm>
+            <a:off x="0" y="0"/>
+            <a:ext cx="73152" cy="6858000"/>
+          </a:xfrm>
+          <a:prstGeom prst="rect">
+            <a:avLst/>
+          </a:prstGeom>
+          <a:solidFill>
+            <a:srgbClr val="B0893E"/>
+          </a:solidFill>
+          <a:ln>
+            <a:noFill/>
+          </a:ln>
+        </p:spPr>
+        <p:style>
+          <a:lnRef idx="1">
+            <a:schemeClr val="accent1"/>
+          </a:lnRef>
+          <a:fillRef idx="3">
+            <a:schemeClr val="accent1"/>
+          </a:fillRef>
+          <a:effectRef idx="2">
+            <a:schemeClr val="accent1"/>
+          </a:effectRef>
+          <a:fontRef idx="minor">
+            <a:schemeClr val="lt1"/>
+          </a:fontRef>
+        </p:style>
+        <p:txBody>
+          <a:bodyPr rtlCol="0" anchor="ctr"/>
+          <a:lstStyle/>
+          <a:p>
+            <a:pPr algn="ctr"/>
+          </a:p>
+        </p:txBody>
+      </p:sp>
+      <p:sp>
+        <p:nvSpPr>
+          <p:cNvPr id="4" name="TextBox 3"/>
+          <p:cNvSpPr txBox="1"/>
+          <p:nvPr/>
+        </p:nvSpPr>
+        <p:spPr>
+          <a:xfrm>
+            <a:off x="365760" y="164592"/>
+            <a:ext cx="8412480" cy="256032"/>
+          </a:xfrm>
+          <a:prstGeom prst="rect">
+            <a:avLst/>
+          </a:prstGeom>
+          <a:noFill/>
+        </p:spPr>
+        <p:txBody>
+          <a:bodyPr wrap="square">
+            <a:spAutoFit/>
+          </a:bodyPr>
+          <a:lstStyle/>
+          <a:p>
+            <a:pPr algn="l"/>
+            <a:r>
+              <a:rPr sz="1000" b="0">
+                <a:solidFill>
+                  <a:srgbClr val="B0893E"/>
+                </a:solidFill>
+                <a:latin typeface="Calibri"/>
+              </a:rPr>
+              <a:t>EVIDENCE ROOM — AP AGENT OS   ·   Decision</a:t>
+            </a:r>
+          </a:p>
+        </p:txBody>
+      </p:sp>
+      <p:sp>
+        <p:nvSpPr>
+          <p:cNvPr id="5" name="TextBox 4"/>
+          <p:cNvSpPr txBox="1"/>
+          <p:nvPr/>
+        </p:nvSpPr>
+        <p:spPr>
+          <a:xfrm>
+            <a:off x="365760" y="502920"/>
+            <a:ext cx="8412480" cy="731520"/>
+          </a:xfrm>
+          <a:prstGeom prst="rect">
+            <a:avLst/>
+          </a:prstGeom>
+          <a:noFill/>
+        </p:spPr>
+        <p:txBody>
+          <a:bodyPr wrap="square">
+            <a:spAutoFit/>
+          </a:bodyPr>
+          <a:lstStyle/>
+          <a:p>
+            <a:pPr algn="l"/>
+            <a:r>
+              <a:rPr sz="2600" b="0">
+                <a:solidFill>
+                  <a:srgbClr val="12160F"/>
+                </a:solidFill>
+                <a:latin typeface="Georgia"/>
+              </a:rPr>
+              <a:t>The ask</a:t>
+            </a:r>
+          </a:p>
+        </p:txBody>
+      </p:sp>
+      <p:sp>
+        <p:nvSpPr>
+          <p:cNvPr id="6" name="TextBox 5"/>
+          <p:cNvSpPr txBox="1"/>
+          <p:nvPr/>
+        </p:nvSpPr>
+        <p:spPr>
+          <a:xfrm>
+            <a:off x="365760" y="1371600"/>
+            <a:ext cx="8321040" cy="4937760"/>
+          </a:xfrm>
+          <a:prstGeom prst="rect">
+            <a:avLst/>
+          </a:prstGeom>
+          <a:noFill/>
+        </p:spPr>
+        <p:txBody>
+          <a:bodyPr wrap="square">
+            <a:spAutoFit/>
+          </a:bodyPr>
+          <a:lstStyle/>
+          <a:p>
+            <a:pPr>
+              <a:spcAft>
+                <a:spcPts val="800"/>
+              </a:spcAft>
+            </a:pPr>
+            <a:r>
+              <a:rPr sz="1600">
+                <a:solidFill>
+                  <a:srgbClr val="12160F"/>
+                </a:solidFill>
+                <a:latin typeface="Calibri"/>
+              </a:rPr>
+              <a:t>·  Sit the free diagnostic (36 questions).</a:t>
+            </a:r>
+          </a:p>
+          <a:p>
+            <a:pPr>
+              <a:spcAft>
+                <a:spcPts val="800"/>
+              </a:spcAft>
+            </a:pPr>
+            <a:r>
+              <a:rPr sz="1600">
+                <a:solidFill>
+                  <a:srgbClr val="12160F"/>
+                </a:solidFill>
+                <a:latin typeface="Calibri"/>
+              </a:rPr>
+              <a:t>·  Charter Wave 1 with owners and exclusions.</a:t>
+            </a:r>
+          </a:p>
+          <a:p>
+            <a:pPr>
+              <a:spcAft>
+                <a:spcPts val="800"/>
+              </a:spcAft>
+            </a:pPr>
+            <a:r>
+              <a:rPr sz="1600">
+                <a:solidFill>
+                  <a:srgbClr val="12160F"/>
+                </a:solidFill>
+                <a:latin typeface="Calibri"/>
+              </a:rPr>
+              <a:t>·  Licence Professional ($199) or Team ($499) if the room agrees.</a:t>
+            </a:r>
+          </a:p>
+          <a:p>
+            <a:pPr>
+              <a:spcAft>
+                <a:spcPts val="800"/>
+              </a:spcAft>
+            </a:pPr>
+            <a:r>
+              <a:rPr sz="1600">
+                <a:solidFill>
+                  <a:srgbClr val="12160F"/>
+                </a:solidFill>
+                <a:latin typeface="Calibri"/>
+              </a:rPr>
+              <a:t>·  Counsel reviews licence, privacy, and the Evidence Room LLC collision note before public launch.</a:t>
+            </a:r>
+          </a:p>
+          <a:p>
+            <a:pPr>
+              <a:spcAft>
+                <a:spcPts val="800"/>
+              </a:spcAft>
+            </a:pPr>
+            <a:r>
+              <a:rPr sz="1600">
+                <a:solidFill>
+                  <a:srgbClr val="12160F"/>
+                </a:solidFill>
+                <a:latin typeface="Calibri"/>
+              </a:rPr>
+              <a:t>·  Refuse the frame if the success criterion is a guaranteed ROI.</a:t>
             </a:r>
           </a:p>
         </p:txBody>
@@ -3160,20 +3941,155 @@
       <p:grpSpPr/>
       <p:sp>
         <p:nvSpPr>
-          <p:cNvPr id="2" name="Title 1"/>
-          <p:cNvSpPr>
-            <a:spLocks noGrp="1"/>
-          </p:cNvSpPr>
-          <p:nvPr>
-            <p:ph type="title"/>
-          </p:nvPr>
-        </p:nvSpPr>
-        <p:spPr/>
-        <p:txBody>
-          <a:bodyPr/>
-          <a:lstStyle/>
-          <a:p>
-            <a:r>
+          <p:cNvPr id="2" name="Rectangle 1"/>
+          <p:cNvSpPr/>
+          <p:nvPr/>
+        </p:nvSpPr>
+        <p:spPr>
+          <a:xfrm>
+            <a:off x="0" y="0"/>
+            <a:ext cx="9144000" cy="6858000"/>
+          </a:xfrm>
+          <a:prstGeom prst="rect">
+            <a:avLst/>
+          </a:prstGeom>
+          <a:solidFill>
+            <a:srgbClr val="F3EEE4"/>
+          </a:solidFill>
+          <a:ln>
+            <a:noFill/>
+          </a:ln>
+        </p:spPr>
+        <p:style>
+          <a:lnRef idx="1">
+            <a:schemeClr val="accent1"/>
+          </a:lnRef>
+          <a:fillRef idx="3">
+            <a:schemeClr val="accent1"/>
+          </a:fillRef>
+          <a:effectRef idx="2">
+            <a:schemeClr val="accent1"/>
+          </a:effectRef>
+          <a:fontRef idx="minor">
+            <a:schemeClr val="lt1"/>
+          </a:fontRef>
+        </p:style>
+        <p:txBody>
+          <a:bodyPr rtlCol="0" anchor="ctr"/>
+          <a:lstStyle/>
+          <a:p>
+            <a:pPr algn="ctr"/>
+          </a:p>
+        </p:txBody>
+      </p:sp>
+      <p:sp>
+        <p:nvSpPr>
+          <p:cNvPr id="3" name="Rectangle 2"/>
+          <p:cNvSpPr/>
+          <p:nvPr/>
+        </p:nvSpPr>
+        <p:spPr>
+          <a:xfrm>
+            <a:off x="0" y="0"/>
+            <a:ext cx="73152" cy="6858000"/>
+          </a:xfrm>
+          <a:prstGeom prst="rect">
+            <a:avLst/>
+          </a:prstGeom>
+          <a:solidFill>
+            <a:srgbClr val="B0893E"/>
+          </a:solidFill>
+          <a:ln>
+            <a:noFill/>
+          </a:ln>
+        </p:spPr>
+        <p:style>
+          <a:lnRef idx="1">
+            <a:schemeClr val="accent1"/>
+          </a:lnRef>
+          <a:fillRef idx="3">
+            <a:schemeClr val="accent1"/>
+          </a:fillRef>
+          <a:effectRef idx="2">
+            <a:schemeClr val="accent1"/>
+          </a:effectRef>
+          <a:fontRef idx="minor">
+            <a:schemeClr val="lt1"/>
+          </a:fontRef>
+        </p:style>
+        <p:txBody>
+          <a:bodyPr rtlCol="0" anchor="ctr"/>
+          <a:lstStyle/>
+          <a:p>
+            <a:pPr algn="ctr"/>
+          </a:p>
+        </p:txBody>
+      </p:sp>
+      <p:sp>
+        <p:nvSpPr>
+          <p:cNvPr id="4" name="TextBox 3"/>
+          <p:cNvSpPr txBox="1"/>
+          <p:nvPr/>
+        </p:nvSpPr>
+        <p:spPr>
+          <a:xfrm>
+            <a:off x="365760" y="164592"/>
+            <a:ext cx="8412480" cy="256032"/>
+          </a:xfrm>
+          <a:prstGeom prst="rect">
+            <a:avLst/>
+          </a:prstGeom>
+          <a:noFill/>
+        </p:spPr>
+        <p:txBody>
+          <a:bodyPr wrap="square">
+            <a:spAutoFit/>
+          </a:bodyPr>
+          <a:lstStyle/>
+          <a:p>
+            <a:pPr algn="l"/>
+            <a:r>
+              <a:rPr sz="1000" b="0">
+                <a:solidFill>
+                  <a:srgbClr val="B0893E"/>
+                </a:solidFill>
+                <a:latin typeface="Calibri"/>
+              </a:rPr>
+              <a:t>EVIDENCE ROOM — AP AGENT OS   ·   Ask</a:t>
+            </a:r>
+          </a:p>
+        </p:txBody>
+      </p:sp>
+      <p:sp>
+        <p:nvSpPr>
+          <p:cNvPr id="5" name="TextBox 4"/>
+          <p:cNvSpPr txBox="1"/>
+          <p:nvPr/>
+        </p:nvSpPr>
+        <p:spPr>
+          <a:xfrm>
+            <a:off x="365760" y="502920"/>
+            <a:ext cx="8412480" cy="731520"/>
+          </a:xfrm>
+          <a:prstGeom prst="rect">
+            <a:avLst/>
+          </a:prstGeom>
+          <a:noFill/>
+        </p:spPr>
+        <p:txBody>
+          <a:bodyPr wrap="square">
+            <a:spAutoFit/>
+          </a:bodyPr>
+          <a:lstStyle/>
+          <a:p>
+            <a:pPr algn="l"/>
+            <a:r>
+              <a:rPr sz="2600" b="0">
+                <a:solidFill>
+                  <a:srgbClr val="12160F"/>
+                </a:solidFill>
+                <a:latin typeface="Georgia"/>
+              </a:rPr>
               <a:t>What you are being asked</a:t>
             </a:r>
           </a:p>
@@ -3181,40 +4097,103 @@
       </p:sp>
       <p:sp>
         <p:nvSpPr>
-          <p:cNvPr id="3" name="Content Placeholder 2"/>
-          <p:cNvSpPr>
-            <a:spLocks noGrp="1"/>
-          </p:cNvSpPr>
-          <p:nvPr>
-            <p:ph idx="1"/>
-          </p:nvPr>
-        </p:nvSpPr>
-        <p:spPr/>
-        <p:txBody>
-          <a:bodyPr/>
-          <a:lstStyle/>
-          <a:p>
-            <a:pPr/>
-            <a:r>
-              <a:t>Put AI on accounts payable without unofficial permission.</a:t>
-            </a:r>
-          </a:p>
-          <a:p>
-            <a:pPr/>
-            <a:r>
-              <a:t>Keep ERP as the accounting system of record.</a:t>
-            </a:r>
-          </a:p>
-          <a:p>
-            <a:pPr/>
-            <a:r>
-              <a:t>Keep named humans as the cash system of record.</a:t>
-            </a:r>
-          </a:p>
-          <a:p>
-            <a:pPr/>
-            <a:r>
-              <a:t>Do not buy another platform to start.</a:t>
+          <p:cNvPr id="6" name="TextBox 5"/>
+          <p:cNvSpPr txBox="1"/>
+          <p:nvPr/>
+        </p:nvSpPr>
+        <p:spPr>
+          <a:xfrm>
+            <a:off x="365760" y="1371600"/>
+            <a:ext cx="8321040" cy="4937760"/>
+          </a:xfrm>
+          <a:prstGeom prst="rect">
+            <a:avLst/>
+          </a:prstGeom>
+          <a:noFill/>
+        </p:spPr>
+        <p:txBody>
+          <a:bodyPr wrap="square">
+            <a:spAutoFit/>
+          </a:bodyPr>
+          <a:lstStyle/>
+          <a:p>
+            <a:pPr>
+              <a:spcAft>
+                <a:spcPts val="800"/>
+              </a:spcAft>
+            </a:pPr>
+            <a:r>
+              <a:rPr sz="1600">
+                <a:solidFill>
+                  <a:srgbClr val="12160F"/>
+                </a:solidFill>
+                <a:latin typeface="Calibri"/>
+              </a:rPr>
+              <a:t>·  Put AI on invoice-to-pay without a workforce model.</a:t>
+            </a:r>
+          </a:p>
+          <a:p>
+            <a:pPr>
+              <a:spcAft>
+                <a:spcPts val="800"/>
+              </a:spcAft>
+            </a:pPr>
+            <a:r>
+              <a:rPr sz="1600">
+                <a:solidFill>
+                  <a:srgbClr val="12160F"/>
+                </a:solidFill>
+                <a:latin typeface="Calibri"/>
+              </a:rPr>
+              <a:t>·  Keep ERP as the accounting system of record.</a:t>
+            </a:r>
+          </a:p>
+          <a:p>
+            <a:pPr>
+              <a:spcAft>
+                <a:spcPts val="800"/>
+              </a:spcAft>
+            </a:pPr>
+            <a:r>
+              <a:rPr sz="1600">
+                <a:solidFill>
+                  <a:srgbClr val="12160F"/>
+                </a:solidFill>
+                <a:latin typeface="Calibri"/>
+              </a:rPr>
+              <a:t>·  Keep named humans as the cash system of record.</a:t>
+            </a:r>
+          </a:p>
+          <a:p>
+            <a:pPr>
+              <a:spcAft>
+                <a:spcPts val="800"/>
+              </a:spcAft>
+            </a:pPr>
+            <a:r>
+              <a:rPr sz="1600">
+                <a:solidFill>
+                  <a:srgbClr val="12160F"/>
+                </a:solidFill>
+                <a:latin typeface="Calibri"/>
+              </a:rPr>
+              <a:t>·  Do not buy another platform to start the design work.</a:t>
+            </a:r>
+          </a:p>
+          <a:p>
+            <a:pPr>
+              <a:spcAft>
+                <a:spcPts val="800"/>
+              </a:spcAft>
+            </a:pPr>
+            <a:r>
+              <a:rPr sz="1600">
+                <a:solidFill>
+                  <a:srgbClr val="12160F"/>
+                </a:solidFill>
+                <a:latin typeface="Calibri"/>
+              </a:rPr>
+              <a:t>·  Do not accept a savings guarantee as the success criterion.</a:t>
             </a:r>
           </a:p>
         </p:txBody>
@@ -3239,61 +4218,486 @@
       <p:grpSpPr/>
       <p:sp>
         <p:nvSpPr>
-          <p:cNvPr id="2" name="Title 1"/>
-          <p:cNvSpPr>
-            <a:spLocks noGrp="1"/>
-          </p:cNvSpPr>
-          <p:nvPr>
-            <p:ph type="title"/>
-          </p:nvPr>
-        </p:nvSpPr>
-        <p:spPr/>
-        <p:txBody>
-          <a:bodyPr/>
-          <a:lstStyle/>
-          <a:p>
-            <a:r>
-              <a:t>What this is</a:t>
-            </a:r>
-          </a:p>
-        </p:txBody>
-      </p:sp>
-      <p:sp>
-        <p:nvSpPr>
-          <p:cNvPr id="3" name="Content Placeholder 2"/>
-          <p:cNvSpPr>
-            <a:spLocks noGrp="1"/>
-          </p:cNvSpPr>
-          <p:nvPr>
-            <p:ph idx="1"/>
-          </p:nvPr>
-        </p:nvSpPr>
-        <p:spPr/>
-        <p:txBody>
-          <a:bodyPr/>
-          <a:lstStyle/>
-          <a:p>
-            <a:pPr/>
-            <a:r>
-              <a:t>A Finance Agent Operating System — method and toolkit.</a:t>
-            </a:r>
-          </a:p>
-          <a:p>
-            <a:pPr/>
-            <a:r>
-              <a:t>Sixteen named agents, a packet standard, a permission ladder.</a:t>
-            </a:r>
-          </a:p>
-          <a:p>
-            <a:pPr/>
-            <a:r>
-              <a:t>Not an ERP. Not a payment product. Not a prompt pack.</a:t>
-            </a:r>
-          </a:p>
-          <a:p>
-            <a:pPr/>
-            <a:r>
-              <a:t>Not a guarantee of savings, fraud detection, or compliance.</a:t>
+          <p:cNvPr id="2" name="Rectangle 1"/>
+          <p:cNvSpPr/>
+          <p:nvPr/>
+        </p:nvSpPr>
+        <p:spPr>
+          <a:xfrm>
+            <a:off x="0" y="0"/>
+            <a:ext cx="9144000" cy="6858000"/>
+          </a:xfrm>
+          <a:prstGeom prst="rect">
+            <a:avLst/>
+          </a:prstGeom>
+          <a:solidFill>
+            <a:srgbClr val="F3EEE4"/>
+          </a:solidFill>
+          <a:ln>
+            <a:noFill/>
+          </a:ln>
+        </p:spPr>
+        <p:style>
+          <a:lnRef idx="1">
+            <a:schemeClr val="accent1"/>
+          </a:lnRef>
+          <a:fillRef idx="3">
+            <a:schemeClr val="accent1"/>
+          </a:fillRef>
+          <a:effectRef idx="2">
+            <a:schemeClr val="accent1"/>
+          </a:effectRef>
+          <a:fontRef idx="minor">
+            <a:schemeClr val="lt1"/>
+          </a:fontRef>
+        </p:style>
+        <p:txBody>
+          <a:bodyPr rtlCol="0" anchor="ctr"/>
+          <a:lstStyle/>
+          <a:p>
+            <a:pPr algn="ctr"/>
+          </a:p>
+        </p:txBody>
+      </p:sp>
+      <p:sp>
+        <p:nvSpPr>
+          <p:cNvPr id="3" name="Rectangle 2"/>
+          <p:cNvSpPr/>
+          <p:nvPr/>
+        </p:nvSpPr>
+        <p:spPr>
+          <a:xfrm>
+            <a:off x="0" y="0"/>
+            <a:ext cx="73152" cy="6858000"/>
+          </a:xfrm>
+          <a:prstGeom prst="rect">
+            <a:avLst/>
+          </a:prstGeom>
+          <a:solidFill>
+            <a:srgbClr val="B0893E"/>
+          </a:solidFill>
+          <a:ln>
+            <a:noFill/>
+          </a:ln>
+        </p:spPr>
+        <p:style>
+          <a:lnRef idx="1">
+            <a:schemeClr val="accent1"/>
+          </a:lnRef>
+          <a:fillRef idx="3">
+            <a:schemeClr val="accent1"/>
+          </a:fillRef>
+          <a:effectRef idx="2">
+            <a:schemeClr val="accent1"/>
+          </a:effectRef>
+          <a:fontRef idx="minor">
+            <a:schemeClr val="lt1"/>
+          </a:fontRef>
+        </p:style>
+        <p:txBody>
+          <a:bodyPr rtlCol="0" anchor="ctr"/>
+          <a:lstStyle/>
+          <a:p>
+            <a:pPr algn="ctr"/>
+          </a:p>
+        </p:txBody>
+      </p:sp>
+      <p:sp>
+        <p:nvSpPr>
+          <p:cNvPr id="4" name="TextBox 3"/>
+          <p:cNvSpPr txBox="1"/>
+          <p:nvPr/>
+        </p:nvSpPr>
+        <p:spPr>
+          <a:xfrm>
+            <a:off x="365760" y="164592"/>
+            <a:ext cx="8412480" cy="256032"/>
+          </a:xfrm>
+          <a:prstGeom prst="rect">
+            <a:avLst/>
+          </a:prstGeom>
+          <a:noFill/>
+        </p:spPr>
+        <p:txBody>
+          <a:bodyPr wrap="square">
+            <a:spAutoFit/>
+          </a:bodyPr>
+          <a:lstStyle/>
+          <a:p>
+            <a:pPr algn="l"/>
+            <a:r>
+              <a:rPr sz="1000" b="0">
+                <a:solidFill>
+                  <a:srgbClr val="B0893E"/>
+                </a:solidFill>
+                <a:latin typeface="Calibri"/>
+              </a:rPr>
+              <a:t>EVIDENCE ROOM — AP AGENT OS   ·   Category</a:t>
+            </a:r>
+          </a:p>
+        </p:txBody>
+      </p:sp>
+      <p:sp>
+        <p:nvSpPr>
+          <p:cNvPr id="5" name="TextBox 4"/>
+          <p:cNvSpPr txBox="1"/>
+          <p:nvPr/>
+        </p:nvSpPr>
+        <p:spPr>
+          <a:xfrm>
+            <a:off x="365760" y="502920"/>
+            <a:ext cx="8412480" cy="548640"/>
+          </a:xfrm>
+          <a:prstGeom prst="rect">
+            <a:avLst/>
+          </a:prstGeom>
+          <a:noFill/>
+        </p:spPr>
+        <p:txBody>
+          <a:bodyPr wrap="square">
+            <a:spAutoFit/>
+          </a:bodyPr>
+          <a:lstStyle/>
+          <a:p>
+            <a:pPr algn="l"/>
+            <a:r>
+              <a:rPr sz="2400" b="0">
+                <a:solidFill>
+                  <a:srgbClr val="12160F"/>
+                </a:solidFill>
+                <a:latin typeface="Georgia"/>
+              </a:rPr>
+              <a:t>What this is — and is not</a:t>
+            </a:r>
+          </a:p>
+        </p:txBody>
+      </p:sp>
+      <p:sp>
+        <p:nvSpPr>
+          <p:cNvPr id="6" name="Rectangle 5"/>
+          <p:cNvSpPr/>
+          <p:nvPr/>
+        </p:nvSpPr>
+        <p:spPr>
+          <a:xfrm>
+            <a:off x="365760" y="1234440"/>
+            <a:ext cx="4023360" cy="5029200"/>
+          </a:xfrm>
+          <a:prstGeom prst="rect">
+            <a:avLst/>
+          </a:prstGeom>
+          <a:solidFill>
+            <a:srgbClr val="FAF8F3"/>
+          </a:solidFill>
+          <a:ln>
+            <a:noFill/>
+          </a:ln>
+        </p:spPr>
+        <p:style>
+          <a:lnRef idx="1">
+            <a:schemeClr val="accent1"/>
+          </a:lnRef>
+          <a:fillRef idx="3">
+            <a:schemeClr val="accent1"/>
+          </a:fillRef>
+          <a:effectRef idx="2">
+            <a:schemeClr val="accent1"/>
+          </a:effectRef>
+          <a:fontRef idx="minor">
+            <a:schemeClr val="lt1"/>
+          </a:fontRef>
+        </p:style>
+        <p:txBody>
+          <a:bodyPr rtlCol="0" anchor="ctr"/>
+          <a:lstStyle/>
+          <a:p>
+            <a:pPr algn="ctr"/>
+          </a:p>
+        </p:txBody>
+      </p:sp>
+      <p:sp>
+        <p:nvSpPr>
+          <p:cNvPr id="7" name="Rectangle 6"/>
+          <p:cNvSpPr/>
+          <p:nvPr/>
+        </p:nvSpPr>
+        <p:spPr>
+          <a:xfrm>
+            <a:off x="4754880" y="1234440"/>
+            <a:ext cx="4023360" cy="5029200"/>
+          </a:xfrm>
+          <a:prstGeom prst="rect">
+            <a:avLst/>
+          </a:prstGeom>
+          <a:solidFill>
+            <a:srgbClr val="FAF8F3"/>
+          </a:solidFill>
+          <a:ln>
+            <a:noFill/>
+          </a:ln>
+        </p:spPr>
+        <p:style>
+          <a:lnRef idx="1">
+            <a:schemeClr val="accent1"/>
+          </a:lnRef>
+          <a:fillRef idx="3">
+            <a:schemeClr val="accent1"/>
+          </a:fillRef>
+          <a:effectRef idx="2">
+            <a:schemeClr val="accent1"/>
+          </a:effectRef>
+          <a:fontRef idx="minor">
+            <a:schemeClr val="lt1"/>
+          </a:fontRef>
+        </p:style>
+        <p:txBody>
+          <a:bodyPr rtlCol="0" anchor="ctr"/>
+          <a:lstStyle/>
+          <a:p>
+            <a:pPr algn="ctr"/>
+          </a:p>
+        </p:txBody>
+      </p:sp>
+      <p:sp>
+        <p:nvSpPr>
+          <p:cNvPr id="8" name="TextBox 7"/>
+          <p:cNvSpPr txBox="1"/>
+          <p:nvPr/>
+        </p:nvSpPr>
+        <p:spPr>
+          <a:xfrm>
+            <a:off x="502920" y="1371600"/>
+            <a:ext cx="3749039" cy="365760"/>
+          </a:xfrm>
+          <a:prstGeom prst="rect">
+            <a:avLst/>
+          </a:prstGeom>
+          <a:noFill/>
+        </p:spPr>
+        <p:txBody>
+          <a:bodyPr wrap="square">
+            <a:spAutoFit/>
+          </a:bodyPr>
+          <a:lstStyle/>
+          <a:p>
+            <a:pPr algn="l"/>
+            <a:r>
+              <a:rPr sz="1400" b="1">
+                <a:solidFill>
+                  <a:srgbClr val="B0893E"/>
+                </a:solidFill>
+                <a:latin typeface="Calibri"/>
+              </a:rPr>
+              <a:t>This is</a:t>
+            </a:r>
+          </a:p>
+        </p:txBody>
+      </p:sp>
+      <p:sp>
+        <p:nvSpPr>
+          <p:cNvPr id="9" name="TextBox 8"/>
+          <p:cNvSpPr txBox="1"/>
+          <p:nvPr/>
+        </p:nvSpPr>
+        <p:spPr>
+          <a:xfrm>
+            <a:off x="502920" y="1828800"/>
+            <a:ext cx="3749039" cy="4206240"/>
+          </a:xfrm>
+          <a:prstGeom prst="rect">
+            <a:avLst/>
+          </a:prstGeom>
+          <a:noFill/>
+        </p:spPr>
+        <p:txBody>
+          <a:bodyPr wrap="square">
+            <a:spAutoFit/>
+          </a:bodyPr>
+          <a:lstStyle/>
+          <a:p>
+            <a:pPr>
+              <a:spcAft>
+                <a:spcPts val="800"/>
+              </a:spcAft>
+            </a:pPr>
+            <a:r>
+              <a:rPr sz="1400">
+                <a:solidFill>
+                  <a:srgbClr val="12160F"/>
+                </a:solidFill>
+                <a:latin typeface="Calibri"/>
+              </a:rPr>
+              <a:t>·  A Finance Agent Operating System — method and toolkit.</a:t>
+            </a:r>
+          </a:p>
+          <a:p>
+            <a:pPr>
+              <a:spcAft>
+                <a:spcPts val="800"/>
+              </a:spcAft>
+            </a:pPr>
+            <a:r>
+              <a:rPr sz="1400">
+                <a:solidFill>
+                  <a:srgbClr val="12160F"/>
+                </a:solidFill>
+                <a:latin typeface="Calibri"/>
+              </a:rPr>
+              <a:t>·  Sixteen named agents, a packet standard, a permission ladder.</a:t>
+            </a:r>
+          </a:p>
+          <a:p>
+            <a:pPr>
+              <a:spcAft>
+                <a:spcPts val="800"/>
+              </a:spcAft>
+            </a:pPr>
+            <a:r>
+              <a:rPr sz="1400">
+                <a:solidFill>
+                  <a:srgbClr val="12160F"/>
+                </a:solidFill>
+                <a:latin typeface="Calibri"/>
+              </a:rPr>
+              <a:t>·  An evidence-gated promotion model (L0–L4).</a:t>
+            </a:r>
+          </a:p>
+          <a:p>
+            <a:pPr>
+              <a:spcAft>
+                <a:spcPts val="800"/>
+              </a:spcAft>
+            </a:pPr>
+            <a:r>
+              <a:rPr sz="1400">
+                <a:solidFill>
+                  <a:srgbClr val="12160F"/>
+                </a:solidFill>
+                <a:latin typeface="Calibri"/>
+              </a:rPr>
+              <a:t>·  ERP-agnostic: SAP, Oracle, D365, NetSuite, Workday.</a:t>
+            </a:r>
+          </a:p>
+        </p:txBody>
+      </p:sp>
+      <p:sp>
+        <p:nvSpPr>
+          <p:cNvPr id="10" name="TextBox 9"/>
+          <p:cNvSpPr txBox="1"/>
+          <p:nvPr/>
+        </p:nvSpPr>
+        <p:spPr>
+          <a:xfrm>
+            <a:off x="4892040" y="1371600"/>
+            <a:ext cx="3749039" cy="365760"/>
+          </a:xfrm>
+          <a:prstGeom prst="rect">
+            <a:avLst/>
+          </a:prstGeom>
+          <a:noFill/>
+        </p:spPr>
+        <p:txBody>
+          <a:bodyPr wrap="square">
+            <a:spAutoFit/>
+          </a:bodyPr>
+          <a:lstStyle/>
+          <a:p>
+            <a:pPr algn="l"/>
+            <a:r>
+              <a:rPr sz="1400" b="1">
+                <a:solidFill>
+                  <a:srgbClr val="B0893E"/>
+                </a:solidFill>
+                <a:latin typeface="Calibri"/>
+              </a:rPr>
+              <a:t>This is not</a:t>
+            </a:r>
+          </a:p>
+        </p:txBody>
+      </p:sp>
+      <p:sp>
+        <p:nvSpPr>
+          <p:cNvPr id="11" name="TextBox 10"/>
+          <p:cNvSpPr txBox="1"/>
+          <p:nvPr/>
+        </p:nvSpPr>
+        <p:spPr>
+          <a:xfrm>
+            <a:off x="4892040" y="1828800"/>
+            <a:ext cx="3749039" cy="4206240"/>
+          </a:xfrm>
+          <a:prstGeom prst="rect">
+            <a:avLst/>
+          </a:prstGeom>
+          <a:noFill/>
+        </p:spPr>
+        <p:txBody>
+          <a:bodyPr wrap="square">
+            <a:spAutoFit/>
+          </a:bodyPr>
+          <a:lstStyle/>
+          <a:p>
+            <a:pPr>
+              <a:spcAft>
+                <a:spcPts val="800"/>
+              </a:spcAft>
+            </a:pPr>
+            <a:r>
+              <a:rPr sz="1400">
+                <a:solidFill>
+                  <a:srgbClr val="12160F"/>
+                </a:solidFill>
+                <a:latin typeface="Calibri"/>
+              </a:rPr>
+              <a:t>·  An ERP, OCR engine, or payment institution.</a:t>
+            </a:r>
+          </a:p>
+          <a:p>
+            <a:pPr>
+              <a:spcAft>
+                <a:spcPts val="800"/>
+              </a:spcAft>
+            </a:pPr>
+            <a:r>
+              <a:rPr sz="1400">
+                <a:solidFill>
+                  <a:srgbClr val="12160F"/>
+                </a:solidFill>
+                <a:latin typeface="Calibri"/>
+              </a:rPr>
+              <a:t>·  A ChatGPT prompt pack or AI ebook.</a:t>
+            </a:r>
+          </a:p>
+          <a:p>
+            <a:pPr>
+              <a:spcAft>
+                <a:spcPts val="800"/>
+              </a:spcAft>
+            </a:pPr>
+            <a:r>
+              <a:rPr sz="1400">
+                <a:solidFill>
+                  <a:srgbClr val="12160F"/>
+                </a:solidFill>
+                <a:latin typeface="Calibri"/>
+              </a:rPr>
+              <a:t>·  A fraud-detection guarantee or compliance certificate.</a:t>
+            </a:r>
+          </a:p>
+          <a:p>
+            <a:pPr>
+              <a:spcAft>
+                <a:spcPts val="800"/>
+              </a:spcAft>
+            </a:pPr>
+            <a:r>
+              <a:rPr sz="1400">
+                <a:solidFill>
+                  <a:srgbClr val="12160F"/>
+                </a:solidFill>
+                <a:latin typeface="Calibri"/>
+              </a:rPr>
+              <a:t>·  A promise of savings, payback, or touchless AP.</a:t>
             </a:r>
           </a:p>
         </p:txBody>
@@ -3318,20 +4722,155 @@
       <p:grpSpPr/>
       <p:sp>
         <p:nvSpPr>
-          <p:cNvPr id="2" name="Title 1"/>
-          <p:cNvSpPr>
-            <a:spLocks noGrp="1"/>
-          </p:cNvSpPr>
-          <p:nvPr>
-            <p:ph type="title"/>
-          </p:nvPr>
-        </p:nvSpPr>
-        <p:spPr/>
-        <p:txBody>
-          <a:bodyPr/>
-          <a:lstStyle/>
-          <a:p>
-            <a:r>
+          <p:cNvPr id="2" name="Rectangle 1"/>
+          <p:cNvSpPr/>
+          <p:nvPr/>
+        </p:nvSpPr>
+        <p:spPr>
+          <a:xfrm>
+            <a:off x="0" y="0"/>
+            <a:ext cx="9144000" cy="6858000"/>
+          </a:xfrm>
+          <a:prstGeom prst="rect">
+            <a:avLst/>
+          </a:prstGeom>
+          <a:solidFill>
+            <a:srgbClr val="F3EEE4"/>
+          </a:solidFill>
+          <a:ln>
+            <a:noFill/>
+          </a:ln>
+        </p:spPr>
+        <p:style>
+          <a:lnRef idx="1">
+            <a:schemeClr val="accent1"/>
+          </a:lnRef>
+          <a:fillRef idx="3">
+            <a:schemeClr val="accent1"/>
+          </a:fillRef>
+          <a:effectRef idx="2">
+            <a:schemeClr val="accent1"/>
+          </a:effectRef>
+          <a:fontRef idx="minor">
+            <a:schemeClr val="lt1"/>
+          </a:fontRef>
+        </p:style>
+        <p:txBody>
+          <a:bodyPr rtlCol="0" anchor="ctr"/>
+          <a:lstStyle/>
+          <a:p>
+            <a:pPr algn="ctr"/>
+          </a:p>
+        </p:txBody>
+      </p:sp>
+      <p:sp>
+        <p:nvSpPr>
+          <p:cNvPr id="3" name="Rectangle 2"/>
+          <p:cNvSpPr/>
+          <p:nvPr/>
+        </p:nvSpPr>
+        <p:spPr>
+          <a:xfrm>
+            <a:off x="0" y="0"/>
+            <a:ext cx="73152" cy="6858000"/>
+          </a:xfrm>
+          <a:prstGeom prst="rect">
+            <a:avLst/>
+          </a:prstGeom>
+          <a:solidFill>
+            <a:srgbClr val="B0893E"/>
+          </a:solidFill>
+          <a:ln>
+            <a:noFill/>
+          </a:ln>
+        </p:spPr>
+        <p:style>
+          <a:lnRef idx="1">
+            <a:schemeClr val="accent1"/>
+          </a:lnRef>
+          <a:fillRef idx="3">
+            <a:schemeClr val="accent1"/>
+          </a:fillRef>
+          <a:effectRef idx="2">
+            <a:schemeClr val="accent1"/>
+          </a:effectRef>
+          <a:fontRef idx="minor">
+            <a:schemeClr val="lt1"/>
+          </a:fontRef>
+        </p:style>
+        <p:txBody>
+          <a:bodyPr rtlCol="0" anchor="ctr"/>
+          <a:lstStyle/>
+          <a:p>
+            <a:pPr algn="ctr"/>
+          </a:p>
+        </p:txBody>
+      </p:sp>
+      <p:sp>
+        <p:nvSpPr>
+          <p:cNvPr id="4" name="TextBox 3"/>
+          <p:cNvSpPr txBox="1"/>
+          <p:nvPr/>
+        </p:nvSpPr>
+        <p:spPr>
+          <a:xfrm>
+            <a:off x="365760" y="164592"/>
+            <a:ext cx="8412480" cy="256032"/>
+          </a:xfrm>
+          <a:prstGeom prst="rect">
+            <a:avLst/>
+          </a:prstGeom>
+          <a:noFill/>
+        </p:spPr>
+        <p:txBody>
+          <a:bodyPr wrap="square">
+            <a:spAutoFit/>
+          </a:bodyPr>
+          <a:lstStyle/>
+          <a:p>
+            <a:pPr algn="l"/>
+            <a:r>
+              <a:rPr sz="1000" b="0">
+                <a:solidFill>
+                  <a:srgbClr val="B0893E"/>
+                </a:solidFill>
+                <a:latin typeface="Calibri"/>
+              </a:rPr>
+              <a:t>EVIDENCE ROOM — AP AGENT OS   ·   Hard hold</a:t>
+            </a:r>
+          </a:p>
+        </p:txBody>
+      </p:sp>
+      <p:sp>
+        <p:nvSpPr>
+          <p:cNvPr id="5" name="TextBox 4"/>
+          <p:cNvSpPr txBox="1"/>
+          <p:nvPr/>
+        </p:nvSpPr>
+        <p:spPr>
+          <a:xfrm>
+            <a:off x="365760" y="502920"/>
+            <a:ext cx="8412480" cy="731520"/>
+          </a:xfrm>
+          <a:prstGeom prst="rect">
+            <a:avLst/>
+          </a:prstGeom>
+          <a:noFill/>
+        </p:spPr>
+        <p:txBody>
+          <a:bodyPr wrap="square">
+            <a:spAutoFit/>
+          </a:bodyPr>
+          <a:lstStyle/>
+          <a:p>
+            <a:pPr algn="l"/>
+            <a:r>
+              <a:rPr sz="2600" b="0">
+                <a:solidFill>
+                  <a:srgbClr val="12160F"/>
+                </a:solidFill>
+                <a:latin typeface="Georgia"/>
+              </a:rPr>
               <a:t>The payment sentence</a:t>
             </a:r>
           </a:p>
@@ -3339,40 +4878,103 @@
       </p:sp>
       <p:sp>
         <p:nvSpPr>
-          <p:cNvPr id="3" name="Content Placeholder 2"/>
-          <p:cNvSpPr>
-            <a:spLocks noGrp="1"/>
-          </p:cNvSpPr>
-          <p:nvPr>
-            <p:ph idx="1"/>
-          </p:nvPr>
-        </p:nvSpPr>
-        <p:spPr/>
-        <p:txBody>
-          <a:bodyPr/>
-          <a:lstStyle/>
-          <a:p>
-            <a:pPr/>
-            <a:r>
-              <a:t>Agents may observe, recommend, or prepare.</a:t>
-            </a:r>
-          </a:p>
-          <a:p>
-            <a:pPr/>
-            <a:r>
-              <a:t>They do not approve, release, or transmit payment.</a:t>
-            </a:r>
-          </a:p>
-          <a:p>
-            <a:pPr/>
-            <a:r>
-              <a:t>Vendor bank changes stay human.</a:t>
-            </a:r>
-          </a:p>
-          <a:p>
-            <a:pPr/>
-            <a:r>
-              <a:t>Period-close attestation stays human.</a:t>
+          <p:cNvPr id="6" name="TextBox 5"/>
+          <p:cNvSpPr txBox="1"/>
+          <p:nvPr/>
+        </p:nvSpPr>
+        <p:spPr>
+          <a:xfrm>
+            <a:off x="365760" y="1371600"/>
+            <a:ext cx="8321040" cy="4937760"/>
+          </a:xfrm>
+          <a:prstGeom prst="rect">
+            <a:avLst/>
+          </a:prstGeom>
+          <a:noFill/>
+        </p:spPr>
+        <p:txBody>
+          <a:bodyPr wrap="square">
+            <a:spAutoFit/>
+          </a:bodyPr>
+          <a:lstStyle/>
+          <a:p>
+            <a:pPr>
+              <a:spcAft>
+                <a:spcPts val="800"/>
+              </a:spcAft>
+            </a:pPr>
+            <a:r>
+              <a:rPr sz="1600">
+                <a:solidFill>
+                  <a:srgbClr val="12160F"/>
+                </a:solidFill>
+                <a:latin typeface="Calibri"/>
+              </a:rPr>
+              <a:t>·  Agents may observe, recommend, or prepare.</a:t>
+            </a:r>
+          </a:p>
+          <a:p>
+            <a:pPr>
+              <a:spcAft>
+                <a:spcPts val="800"/>
+              </a:spcAft>
+            </a:pPr>
+            <a:r>
+              <a:rPr sz="1600">
+                <a:solidFill>
+                  <a:srgbClr val="12160F"/>
+                </a:solidFill>
+                <a:latin typeface="Calibri"/>
+              </a:rPr>
+              <a:t>·  They do not approve, release, or transmit payment.</a:t>
+            </a:r>
+          </a:p>
+          <a:p>
+            <a:pPr>
+              <a:spcAft>
+                <a:spcPts val="800"/>
+              </a:spcAft>
+            </a:pPr>
+            <a:r>
+              <a:rPr sz="1600">
+                <a:solidFill>
+                  <a:srgbClr val="12160F"/>
+                </a:solidFill>
+                <a:latin typeface="Calibri"/>
+              </a:rPr>
+              <a:t>·  Vendor bank-detail changes stay human.</a:t>
+            </a:r>
+          </a:p>
+          <a:p>
+            <a:pPr>
+              <a:spcAft>
+                <a:spcPts val="800"/>
+              </a:spcAft>
+            </a:pPr>
+            <a:r>
+              <a:rPr sz="1600">
+                <a:solidFill>
+                  <a:srgbClr val="12160F"/>
+                </a:solidFill>
+                <a:latin typeface="Calibri"/>
+              </a:rPr>
+              <a:t>·  Period-close attestation stays human.</a:t>
+            </a:r>
+          </a:p>
+          <a:p>
+            <a:pPr>
+              <a:spcAft>
+                <a:spcPts val="800"/>
+              </a:spcAft>
+            </a:pPr>
+            <a:r>
+              <a:rPr sz="1600">
+                <a:solidFill>
+                  <a:srgbClr val="12160F"/>
+                </a:solidFill>
+                <a:latin typeface="Calibri"/>
+              </a:rPr>
+              <a:t>·  Write this on the wall before any pilot.</a:t>
             </a:r>
           </a:p>
         </p:txBody>
@@ -3397,61 +4999,259 @@
       <p:grpSpPr/>
       <p:sp>
         <p:nvSpPr>
-          <p:cNvPr id="2" name="Title 1"/>
-          <p:cNvSpPr>
-            <a:spLocks noGrp="1"/>
-          </p:cNvSpPr>
-          <p:nvPr>
-            <p:ph type="title"/>
-          </p:nvPr>
-        </p:nvSpPr>
-        <p:spPr/>
-        <p:txBody>
-          <a:bodyPr/>
-          <a:lstStyle/>
-          <a:p>
-            <a:r>
-              <a:t>Public record (independent)</a:t>
-            </a:r>
-          </a:p>
-        </p:txBody>
-      </p:sp>
-      <p:sp>
-        <p:nvSpPr>
-          <p:cNvPr id="3" name="Content Placeholder 2"/>
-          <p:cNvSpPr>
-            <a:spLocks noGrp="1"/>
-          </p:cNvSpPr>
-          <p:nvPr>
-            <p:ph idx="1"/>
-          </p:nvPr>
-        </p:nvSpPr>
-        <p:spPr/>
-        <p:txBody>
-          <a:bodyPr/>
-          <a:lstStyle/>
-          <a:p>
-            <a:pPr/>
-            <a:r>
-              <a:t>McKinsey State of AI 2025 (n=1,993): 88% use AI in ≥1 function.</a:t>
-            </a:r>
-          </a:p>
-          <a:p>
-            <a:pPr/>
-            <a:r>
-              <a:t>Nearly two-thirds have not begun scaling across the enterprise.</a:t>
-            </a:r>
-          </a:p>
-          <a:p>
-            <a:pPr/>
-            <a:r>
-              <a:t>62% at least experiment with agents; 23% scale an agent somewhere.</a:t>
-            </a:r>
-          </a:p>
-          <a:p>
-            <a:pPr/>
-            <a:r>
-              <a:t>High performers redesign workflows. That is the work.</a:t>
+          <p:cNvPr id="2" name="Rectangle 1"/>
+          <p:cNvSpPr/>
+          <p:nvPr/>
+        </p:nvSpPr>
+        <p:spPr>
+          <a:xfrm>
+            <a:off x="0" y="0"/>
+            <a:ext cx="9144000" cy="6858000"/>
+          </a:xfrm>
+          <a:prstGeom prst="rect">
+            <a:avLst/>
+          </a:prstGeom>
+          <a:solidFill>
+            <a:srgbClr val="F3EEE4"/>
+          </a:solidFill>
+          <a:ln>
+            <a:noFill/>
+          </a:ln>
+        </p:spPr>
+        <p:style>
+          <a:lnRef idx="1">
+            <a:schemeClr val="accent1"/>
+          </a:lnRef>
+          <a:fillRef idx="3">
+            <a:schemeClr val="accent1"/>
+          </a:fillRef>
+          <a:effectRef idx="2">
+            <a:schemeClr val="accent1"/>
+          </a:effectRef>
+          <a:fontRef idx="minor">
+            <a:schemeClr val="lt1"/>
+          </a:fontRef>
+        </p:style>
+        <p:txBody>
+          <a:bodyPr rtlCol="0" anchor="ctr"/>
+          <a:lstStyle/>
+          <a:p>
+            <a:pPr algn="ctr"/>
+          </a:p>
+        </p:txBody>
+      </p:sp>
+      <p:sp>
+        <p:nvSpPr>
+          <p:cNvPr id="3" name="Rectangle 2"/>
+          <p:cNvSpPr/>
+          <p:nvPr/>
+        </p:nvSpPr>
+        <p:spPr>
+          <a:xfrm>
+            <a:off x="0" y="0"/>
+            <a:ext cx="73152" cy="6858000"/>
+          </a:xfrm>
+          <a:prstGeom prst="rect">
+            <a:avLst/>
+          </a:prstGeom>
+          <a:solidFill>
+            <a:srgbClr val="B0893E"/>
+          </a:solidFill>
+          <a:ln>
+            <a:noFill/>
+          </a:ln>
+        </p:spPr>
+        <p:style>
+          <a:lnRef idx="1">
+            <a:schemeClr val="accent1"/>
+          </a:lnRef>
+          <a:fillRef idx="3">
+            <a:schemeClr val="accent1"/>
+          </a:fillRef>
+          <a:effectRef idx="2">
+            <a:schemeClr val="accent1"/>
+          </a:effectRef>
+          <a:fontRef idx="minor">
+            <a:schemeClr val="lt1"/>
+          </a:fontRef>
+        </p:style>
+        <p:txBody>
+          <a:bodyPr rtlCol="0" anchor="ctr"/>
+          <a:lstStyle/>
+          <a:p>
+            <a:pPr algn="ctr"/>
+          </a:p>
+        </p:txBody>
+      </p:sp>
+      <p:sp>
+        <p:nvSpPr>
+          <p:cNvPr id="4" name="TextBox 3"/>
+          <p:cNvSpPr txBox="1"/>
+          <p:nvPr/>
+        </p:nvSpPr>
+        <p:spPr>
+          <a:xfrm>
+            <a:off x="365760" y="164592"/>
+            <a:ext cx="8412480" cy="256032"/>
+          </a:xfrm>
+          <a:prstGeom prst="rect">
+            <a:avLst/>
+          </a:prstGeom>
+          <a:noFill/>
+        </p:spPr>
+        <p:txBody>
+          <a:bodyPr wrap="square">
+            <a:spAutoFit/>
+          </a:bodyPr>
+          <a:lstStyle/>
+          <a:p>
+            <a:pPr algn="l"/>
+            <a:r>
+              <a:rPr sz="1000" b="0">
+                <a:solidFill>
+                  <a:srgbClr val="B0893E"/>
+                </a:solidFill>
+                <a:latin typeface="Calibri"/>
+              </a:rPr>
+              <a:t>EVIDENCE ROOM — AP AGENT OS   ·   Workforce</a:t>
+            </a:r>
+          </a:p>
+        </p:txBody>
+      </p:sp>
+      <p:sp>
+        <p:nvSpPr>
+          <p:cNvPr id="5" name="TextBox 4"/>
+          <p:cNvSpPr txBox="1"/>
+          <p:nvPr/>
+        </p:nvSpPr>
+        <p:spPr>
+          <a:xfrm>
+            <a:off x="365760" y="502920"/>
+            <a:ext cx="8412480" cy="731520"/>
+          </a:xfrm>
+          <a:prstGeom prst="rect">
+            <a:avLst/>
+          </a:prstGeom>
+          <a:noFill/>
+        </p:spPr>
+        <p:txBody>
+          <a:bodyPr wrap="square">
+            <a:spAutoFit/>
+          </a:bodyPr>
+          <a:lstStyle/>
+          <a:p>
+            <a:pPr algn="l"/>
+            <a:r>
+              <a:rPr sz="2600" b="0">
+                <a:solidFill>
+                  <a:srgbClr val="12160F"/>
+                </a:solidFill>
+                <a:latin typeface="Georgia"/>
+              </a:rPr>
+              <a:t>Sixteen named roles, not “AP AI”</a:t>
+            </a:r>
+          </a:p>
+        </p:txBody>
+      </p:sp>
+      <p:sp>
+        <p:nvSpPr>
+          <p:cNvPr id="6" name="TextBox 5"/>
+          <p:cNvSpPr txBox="1"/>
+          <p:nvPr/>
+        </p:nvSpPr>
+        <p:spPr>
+          <a:xfrm>
+            <a:off x="365760" y="1371600"/>
+            <a:ext cx="8321040" cy="4937760"/>
+          </a:xfrm>
+          <a:prstGeom prst="rect">
+            <a:avLst/>
+          </a:prstGeom>
+          <a:noFill/>
+        </p:spPr>
+        <p:txBody>
+          <a:bodyPr wrap="square">
+            <a:spAutoFit/>
+          </a:bodyPr>
+          <a:lstStyle/>
+          <a:p>
+            <a:pPr>
+              <a:spcAft>
+                <a:spcPts val="800"/>
+              </a:spcAft>
+            </a:pPr>
+            <a:r>
+              <a:rPr sz="1600">
+                <a:solidFill>
+                  <a:srgbClr val="12160F"/>
+                </a:solidFill>
+                <a:latin typeface="Calibri"/>
+              </a:rPr>
+              <a:t>·  Wave 1: Intake, Validation, Matching, Triage, Duplicate &amp; Anomaly, Orchestrator — L0/L1.</a:t>
+            </a:r>
+          </a:p>
+          <a:p>
+            <a:pPr>
+              <a:spcAft>
+                <a:spcPts val="800"/>
+              </a:spcAft>
+            </a:pPr>
+            <a:r>
+              <a:rPr sz="1600">
+                <a:solidFill>
+                  <a:srgbClr val="12160F"/>
+                </a:solidFill>
+                <a:latin typeface="Calibri"/>
+              </a:rPr>
+              <a:t>·  Wave 2: Goods Receipt, Approval, Supplier Resolution, Internal Follow-up, Payment Proposal Review (annotate only).</a:t>
+            </a:r>
+          </a:p>
+          <a:p>
+            <a:pPr>
+              <a:spcAft>
+                <a:spcPts val="800"/>
+              </a:spcAft>
+            </a:pPr>
+            <a:r>
+              <a:rPr sz="1600">
+                <a:solidFill>
+                  <a:srgbClr val="12160F"/>
+                </a:solidFill>
+                <a:latin typeface="Calibri"/>
+              </a:rPr>
+              <a:t>·  Wave 3: Statement, Close, Reporting, Root Cause, PO Quality.</a:t>
+            </a:r>
+          </a:p>
+          <a:p>
+            <a:pPr>
+              <a:spcAft>
+                <a:spcPts val="800"/>
+              </a:spcAft>
+            </a:pPr>
+            <a:r>
+              <a:rPr sz="1600">
+                <a:solidFill>
+                  <a:srgbClr val="12160F"/>
+                </a:solidFill>
+                <a:latin typeface="Calibri"/>
+              </a:rPr>
+              <a:t>·  Wave 4: earned execute for a named clean-match class only — still never payment.</a:t>
+            </a:r>
+          </a:p>
+          <a:p>
+            <a:pPr>
+              <a:spcAft>
+                <a:spcPts val="800"/>
+              </a:spcAft>
+            </a:pPr>
+            <a:r>
+              <a:rPr sz="1600">
+                <a:solidFill>
+                  <a:srgbClr val="12160F"/>
+                </a:solidFill>
+                <a:latin typeface="Calibri"/>
+              </a:rPr>
+              <a:t>·  Do not commission sixteen L3 agents.</a:t>
             </a:r>
           </a:p>
         </p:txBody>
@@ -3476,61 +5276,1301 @@
       <p:grpSpPr/>
       <p:sp>
         <p:nvSpPr>
-          <p:cNvPr id="2" name="Title 1"/>
-          <p:cNvSpPr>
-            <a:spLocks noGrp="1"/>
-          </p:cNvSpPr>
-          <p:nvPr>
-            <p:ph type="title"/>
-          </p:nvPr>
-        </p:nvSpPr>
-        <p:spPr/>
-        <p:txBody>
-          <a:bodyPr/>
-          <a:lstStyle/>
-          <a:p>
-            <a:r>
-              <a:t>Ask</a:t>
-            </a:r>
-          </a:p>
-        </p:txBody>
-      </p:sp>
-      <p:sp>
-        <p:nvSpPr>
-          <p:cNvPr id="3" name="Content Placeholder 2"/>
-          <p:cNvSpPr>
-            <a:spLocks noGrp="1"/>
-          </p:cNvSpPr>
-          <p:nvPr>
-            <p:ph idx="1"/>
-          </p:nvPr>
-        </p:nvSpPr>
-        <p:spPr/>
-        <p:txBody>
-          <a:bodyPr/>
-          <a:lstStyle/>
-          <a:p>
-            <a:pPr/>
-            <a:r>
-              <a:t>Sit the free diagnostic (36 questions).</a:t>
-            </a:r>
-          </a:p>
-          <a:p>
-            <a:pPr/>
-            <a:r>
-              <a:t>Charter Wave 1 with owners and exclusions.</a:t>
-            </a:r>
-          </a:p>
-          <a:p>
-            <a:pPr/>
-            <a:r>
-              <a:t>Licence Professional ($199) or Team ($499) if the room agrees.</a:t>
-            </a:r>
-          </a:p>
-          <a:p>
-            <a:pPr/>
-            <a:r>
-              <a:t>Counsel reviews licence, privacy, and trademark collision notes before public launch.</a:t>
+          <p:cNvPr id="2" name="Rectangle 1"/>
+          <p:cNvSpPr/>
+          <p:nvPr/>
+        </p:nvSpPr>
+        <p:spPr>
+          <a:xfrm>
+            <a:off x="0" y="0"/>
+            <a:ext cx="9144000" cy="6858000"/>
+          </a:xfrm>
+          <a:prstGeom prst="rect">
+            <a:avLst/>
+          </a:prstGeom>
+          <a:solidFill>
+            <a:srgbClr val="F3EEE4"/>
+          </a:solidFill>
+          <a:ln>
+            <a:noFill/>
+          </a:ln>
+        </p:spPr>
+        <p:style>
+          <a:lnRef idx="1">
+            <a:schemeClr val="accent1"/>
+          </a:lnRef>
+          <a:fillRef idx="3">
+            <a:schemeClr val="accent1"/>
+          </a:fillRef>
+          <a:effectRef idx="2">
+            <a:schemeClr val="accent1"/>
+          </a:effectRef>
+          <a:fontRef idx="minor">
+            <a:schemeClr val="lt1"/>
+          </a:fontRef>
+        </p:style>
+        <p:txBody>
+          <a:bodyPr rtlCol="0" anchor="ctr"/>
+          <a:lstStyle/>
+          <a:p>
+            <a:pPr algn="ctr"/>
+          </a:p>
+        </p:txBody>
+      </p:sp>
+      <p:sp>
+        <p:nvSpPr>
+          <p:cNvPr id="3" name="Rectangle 2"/>
+          <p:cNvSpPr/>
+          <p:nvPr/>
+        </p:nvSpPr>
+        <p:spPr>
+          <a:xfrm>
+            <a:off x="0" y="0"/>
+            <a:ext cx="73152" cy="6858000"/>
+          </a:xfrm>
+          <a:prstGeom prst="rect">
+            <a:avLst/>
+          </a:prstGeom>
+          <a:solidFill>
+            <a:srgbClr val="B0893E"/>
+          </a:solidFill>
+          <a:ln>
+            <a:noFill/>
+          </a:ln>
+        </p:spPr>
+        <p:style>
+          <a:lnRef idx="1">
+            <a:schemeClr val="accent1"/>
+          </a:lnRef>
+          <a:fillRef idx="3">
+            <a:schemeClr val="accent1"/>
+          </a:fillRef>
+          <a:effectRef idx="2">
+            <a:schemeClr val="accent1"/>
+          </a:effectRef>
+          <a:fontRef idx="minor">
+            <a:schemeClr val="lt1"/>
+          </a:fontRef>
+        </p:style>
+        <p:txBody>
+          <a:bodyPr rtlCol="0" anchor="ctr"/>
+          <a:lstStyle/>
+          <a:p>
+            <a:pPr algn="ctr"/>
+          </a:p>
+        </p:txBody>
+      </p:sp>
+      <p:sp>
+        <p:nvSpPr>
+          <p:cNvPr id="4" name="TextBox 3"/>
+          <p:cNvSpPr txBox="1"/>
+          <p:nvPr/>
+        </p:nvSpPr>
+        <p:spPr>
+          <a:xfrm>
+            <a:off x="365760" y="164592"/>
+            <a:ext cx="8412480" cy="256032"/>
+          </a:xfrm>
+          <a:prstGeom prst="rect">
+            <a:avLst/>
+          </a:prstGeom>
+          <a:noFill/>
+        </p:spPr>
+        <p:txBody>
+          <a:bodyPr wrap="square">
+            <a:spAutoFit/>
+          </a:bodyPr>
+          <a:lstStyle/>
+          <a:p>
+            <a:pPr algn="l"/>
+            <a:r>
+              <a:rPr sz="1000" b="0">
+                <a:solidFill>
+                  <a:srgbClr val="B0893E"/>
+                </a:solidFill>
+                <a:latin typeface="Calibri"/>
+              </a:rPr>
+              <a:t>EVIDENCE ROOM — AP AGENT OS   ·   Permission</a:t>
+            </a:r>
+          </a:p>
+        </p:txBody>
+      </p:sp>
+      <p:sp>
+        <p:nvSpPr>
+          <p:cNvPr id="5" name="TextBox 4"/>
+          <p:cNvSpPr txBox="1"/>
+          <p:nvPr/>
+        </p:nvSpPr>
+        <p:spPr>
+          <a:xfrm>
+            <a:off x="365760" y="502920"/>
+            <a:ext cx="8412480" cy="548640"/>
+          </a:xfrm>
+          <a:prstGeom prst="rect">
+            <a:avLst/>
+          </a:prstGeom>
+          <a:noFill/>
+        </p:spPr>
+        <p:txBody>
+          <a:bodyPr wrap="square">
+            <a:spAutoFit/>
+          </a:bodyPr>
+          <a:lstStyle/>
+          <a:p>
+            <a:pPr algn="l"/>
+            <a:r>
+              <a:rPr sz="2400" b="0">
+                <a:solidFill>
+                  <a:srgbClr val="12160F"/>
+                </a:solidFill>
+                <a:latin typeface="Georgia"/>
+              </a:rPr>
+              <a:t>Agents earn responsibility</a:t>
+            </a:r>
+          </a:p>
+        </p:txBody>
+      </p:sp>
+      <p:sp>
+        <p:nvSpPr>
+          <p:cNvPr id="6" name="Rectangle 5"/>
+          <p:cNvSpPr/>
+          <p:nvPr/>
+        </p:nvSpPr>
+        <p:spPr>
+          <a:xfrm>
+            <a:off x="365760" y="1234440"/>
+            <a:ext cx="4023360" cy="5029200"/>
+          </a:xfrm>
+          <a:prstGeom prst="rect">
+            <a:avLst/>
+          </a:prstGeom>
+          <a:solidFill>
+            <a:srgbClr val="FAF8F3"/>
+          </a:solidFill>
+          <a:ln>
+            <a:noFill/>
+          </a:ln>
+        </p:spPr>
+        <p:style>
+          <a:lnRef idx="1">
+            <a:schemeClr val="accent1"/>
+          </a:lnRef>
+          <a:fillRef idx="3">
+            <a:schemeClr val="accent1"/>
+          </a:fillRef>
+          <a:effectRef idx="2">
+            <a:schemeClr val="accent1"/>
+          </a:effectRef>
+          <a:fontRef idx="minor">
+            <a:schemeClr val="lt1"/>
+          </a:fontRef>
+        </p:style>
+        <p:txBody>
+          <a:bodyPr rtlCol="0" anchor="ctr"/>
+          <a:lstStyle/>
+          <a:p>
+            <a:pPr algn="ctr"/>
+          </a:p>
+        </p:txBody>
+      </p:sp>
+      <p:sp>
+        <p:nvSpPr>
+          <p:cNvPr id="7" name="Rectangle 6"/>
+          <p:cNvSpPr/>
+          <p:nvPr/>
+        </p:nvSpPr>
+        <p:spPr>
+          <a:xfrm>
+            <a:off x="4754880" y="1234440"/>
+            <a:ext cx="4023360" cy="5029200"/>
+          </a:xfrm>
+          <a:prstGeom prst="rect">
+            <a:avLst/>
+          </a:prstGeom>
+          <a:solidFill>
+            <a:srgbClr val="FAF8F3"/>
+          </a:solidFill>
+          <a:ln>
+            <a:noFill/>
+          </a:ln>
+        </p:spPr>
+        <p:style>
+          <a:lnRef idx="1">
+            <a:schemeClr val="accent1"/>
+          </a:lnRef>
+          <a:fillRef idx="3">
+            <a:schemeClr val="accent1"/>
+          </a:fillRef>
+          <a:effectRef idx="2">
+            <a:schemeClr val="accent1"/>
+          </a:effectRef>
+          <a:fontRef idx="minor">
+            <a:schemeClr val="lt1"/>
+          </a:fontRef>
+        </p:style>
+        <p:txBody>
+          <a:bodyPr rtlCol="0" anchor="ctr"/>
+          <a:lstStyle/>
+          <a:p>
+            <a:pPr algn="ctr"/>
+          </a:p>
+        </p:txBody>
+      </p:sp>
+      <p:sp>
+        <p:nvSpPr>
+          <p:cNvPr id="8" name="TextBox 7"/>
+          <p:cNvSpPr txBox="1"/>
+          <p:nvPr/>
+        </p:nvSpPr>
+        <p:spPr>
+          <a:xfrm>
+            <a:off x="502920" y="1371600"/>
+            <a:ext cx="3749039" cy="365760"/>
+          </a:xfrm>
+          <a:prstGeom prst="rect">
+            <a:avLst/>
+          </a:prstGeom>
+          <a:noFill/>
+        </p:spPr>
+        <p:txBody>
+          <a:bodyPr wrap="square">
+            <a:spAutoFit/>
+          </a:bodyPr>
+          <a:lstStyle/>
+          <a:p>
+            <a:pPr algn="l"/>
+            <a:r>
+              <a:rPr sz="1400" b="1">
+                <a:solidFill>
+                  <a:srgbClr val="B0893E"/>
+                </a:solidFill>
+                <a:latin typeface="Calibri"/>
+              </a:rPr>
+              <a:t>Default</a:t>
+            </a:r>
+          </a:p>
+        </p:txBody>
+      </p:sp>
+      <p:sp>
+        <p:nvSpPr>
+          <p:cNvPr id="9" name="TextBox 8"/>
+          <p:cNvSpPr txBox="1"/>
+          <p:nvPr/>
+        </p:nvSpPr>
+        <p:spPr>
+          <a:xfrm>
+            <a:off x="502920" y="1828800"/>
+            <a:ext cx="3749039" cy="4206240"/>
+          </a:xfrm>
+          <a:prstGeom prst="rect">
+            <a:avLst/>
+          </a:prstGeom>
+          <a:noFill/>
+        </p:spPr>
+        <p:txBody>
+          <a:bodyPr wrap="square">
+            <a:spAutoFit/>
+          </a:bodyPr>
+          <a:lstStyle/>
+          <a:p>
+            <a:pPr>
+              <a:spcAft>
+                <a:spcPts val="800"/>
+              </a:spcAft>
+            </a:pPr>
+            <a:r>
+              <a:rPr sz="1400">
+                <a:solidFill>
+                  <a:srgbClr val="12160F"/>
+                </a:solidFill>
+                <a:latin typeface="Calibri"/>
+              </a:rPr>
+              <a:t>·  L0 Observe — shadow report only.</a:t>
+            </a:r>
+          </a:p>
+          <a:p>
+            <a:pPr>
+              <a:spcAft>
+                <a:spcPts val="800"/>
+              </a:spcAft>
+            </a:pPr>
+            <a:r>
+              <a:rPr sz="1400">
+                <a:solidFill>
+                  <a:srgbClr val="12160F"/>
+                </a:solidFill>
+                <a:latin typeface="Calibri"/>
+              </a:rPr>
+              <a:t>·  L1 Recommend — propose with a packet.</a:t>
+            </a:r>
+          </a:p>
+          <a:p>
+            <a:pPr>
+              <a:spcAft>
+                <a:spcPts val="800"/>
+              </a:spcAft>
+            </a:pPr>
+            <a:r>
+              <a:rPr sz="1400">
+                <a:solidFill>
+                  <a:srgbClr val="12160F"/>
+                </a:solidFill>
+                <a:latin typeface="Calibri"/>
+              </a:rPr>
+              <a:t>·  Remaining at L1 is a successful outcome.</a:t>
+            </a:r>
+          </a:p>
+        </p:txBody>
+      </p:sp>
+      <p:sp>
+        <p:nvSpPr>
+          <p:cNvPr id="10" name="TextBox 9"/>
+          <p:cNvSpPr txBox="1"/>
+          <p:nvPr/>
+        </p:nvSpPr>
+        <p:spPr>
+          <a:xfrm>
+            <a:off x="4892040" y="1371600"/>
+            <a:ext cx="3749039" cy="365760"/>
+          </a:xfrm>
+          <a:prstGeom prst="rect">
+            <a:avLst/>
+          </a:prstGeom>
+          <a:noFill/>
+        </p:spPr>
+        <p:txBody>
+          <a:bodyPr wrap="square">
+            <a:spAutoFit/>
+          </a:bodyPr>
+          <a:lstStyle/>
+          <a:p>
+            <a:pPr algn="l"/>
+            <a:r>
+              <a:rPr sz="1400" b="1">
+                <a:solidFill>
+                  <a:srgbClr val="B0893E"/>
+                </a:solidFill>
+                <a:latin typeface="Calibri"/>
+              </a:rPr>
+              <a:t>Earned only</a:t>
+            </a:r>
+          </a:p>
+        </p:txBody>
+      </p:sp>
+      <p:sp>
+        <p:nvSpPr>
+          <p:cNvPr id="11" name="TextBox 10"/>
+          <p:cNvSpPr txBox="1"/>
+          <p:nvPr/>
+        </p:nvSpPr>
+        <p:spPr>
+          <a:xfrm>
+            <a:off x="4892040" y="1828800"/>
+            <a:ext cx="3749039" cy="4206240"/>
+          </a:xfrm>
+          <a:prstGeom prst="rect">
+            <a:avLst/>
+          </a:prstGeom>
+          <a:noFill/>
+        </p:spPr>
+        <p:txBody>
+          <a:bodyPr wrap="square">
+            <a:spAutoFit/>
+          </a:bodyPr>
+          <a:lstStyle/>
+          <a:p>
+            <a:pPr>
+              <a:spcAft>
+                <a:spcPts val="800"/>
+              </a:spcAft>
+            </a:pPr>
+            <a:r>
+              <a:rPr sz="1400">
+                <a:solidFill>
+                  <a:srgbClr val="12160F"/>
+                </a:solidFill>
+                <a:latin typeface="Calibri"/>
+              </a:rPr>
+              <a:t>·  L2 Prepare — ready-to-act packet; human executes.</a:t>
+            </a:r>
+          </a:p>
+          <a:p>
+            <a:pPr>
+              <a:spcAft>
+                <a:spcPts val="800"/>
+              </a:spcAft>
+            </a:pPr>
+            <a:r>
+              <a:rPr sz="1400">
+                <a:solidFill>
+                  <a:srgbClr val="12160F"/>
+                </a:solidFill>
+                <a:latin typeface="Calibri"/>
+              </a:rPr>
+              <a:t>·  L3 Execute inside a written limit table.</a:t>
+            </a:r>
+          </a:p>
+          <a:p>
+            <a:pPr>
+              <a:spcAft>
+                <a:spcPts val="800"/>
+              </a:spcAft>
+            </a:pPr>
+            <a:r>
+              <a:rPr sz="1400">
+                <a:solidFill>
+                  <a:srgbClr val="12160F"/>
+                </a:solidFill>
+                <a:latin typeface="Calibri"/>
+              </a:rPr>
+              <a:t>·  L4 Managed autonomy of that same bounded set.</a:t>
+            </a:r>
+          </a:p>
+          <a:p>
+            <a:pPr>
+              <a:spcAft>
+                <a:spcPts val="800"/>
+              </a:spcAft>
+            </a:pPr>
+            <a:r>
+              <a:rPr sz="1400">
+                <a:solidFill>
+                  <a:srgbClr val="12160F"/>
+                </a:solidFill>
+                <a:latin typeface="Calibri"/>
+              </a:rPr>
+              <a:t>·  Missing any gate item is a decline.</a:t>
+            </a:r>
+          </a:p>
+        </p:txBody>
+      </p:sp>
+    </p:spTree>
+  </p:cSld>
+  <p:clrMapOvr>
+    <a:masterClrMapping/>
+  </p:clrMapOvr>
+</p:sld>
+</file>
+
+<file path=ppt/slides/slide7.xml><?xml version="1.0" encoding="utf-8"?>
+<p:sld xmlns:a="http://schemas.openxmlformats.org/drawingml/2006/main" xmlns:p="http://schemas.openxmlformats.org/presentationml/2006/main" xmlns:r="http://schemas.openxmlformats.org/officeDocument/2006/relationships">
+  <p:cSld>
+    <p:spTree>
+      <p:nvGrpSpPr>
+        <p:cNvPr id="1" name=""/>
+        <p:cNvGrpSpPr/>
+        <p:nvPr/>
+      </p:nvGrpSpPr>
+      <p:grpSpPr/>
+      <p:sp>
+        <p:nvSpPr>
+          <p:cNvPr id="2" name="Rectangle 1"/>
+          <p:cNvSpPr/>
+          <p:nvPr/>
+        </p:nvSpPr>
+        <p:spPr>
+          <a:xfrm>
+            <a:off x="0" y="0"/>
+            <a:ext cx="9144000" cy="6858000"/>
+          </a:xfrm>
+          <a:prstGeom prst="rect">
+            <a:avLst/>
+          </a:prstGeom>
+          <a:solidFill>
+            <a:srgbClr val="F3EEE4"/>
+          </a:solidFill>
+          <a:ln>
+            <a:noFill/>
+          </a:ln>
+        </p:spPr>
+        <p:style>
+          <a:lnRef idx="1">
+            <a:schemeClr val="accent1"/>
+          </a:lnRef>
+          <a:fillRef idx="3">
+            <a:schemeClr val="accent1"/>
+          </a:fillRef>
+          <a:effectRef idx="2">
+            <a:schemeClr val="accent1"/>
+          </a:effectRef>
+          <a:fontRef idx="minor">
+            <a:schemeClr val="lt1"/>
+          </a:fontRef>
+        </p:style>
+        <p:txBody>
+          <a:bodyPr rtlCol="0" anchor="ctr"/>
+          <a:lstStyle/>
+          <a:p>
+            <a:pPr algn="ctr"/>
+          </a:p>
+        </p:txBody>
+      </p:sp>
+      <p:sp>
+        <p:nvSpPr>
+          <p:cNvPr id="3" name="Rectangle 2"/>
+          <p:cNvSpPr/>
+          <p:nvPr/>
+        </p:nvSpPr>
+        <p:spPr>
+          <a:xfrm>
+            <a:off x="0" y="0"/>
+            <a:ext cx="73152" cy="6858000"/>
+          </a:xfrm>
+          <a:prstGeom prst="rect">
+            <a:avLst/>
+          </a:prstGeom>
+          <a:solidFill>
+            <a:srgbClr val="B0893E"/>
+          </a:solidFill>
+          <a:ln>
+            <a:noFill/>
+          </a:ln>
+        </p:spPr>
+        <p:style>
+          <a:lnRef idx="1">
+            <a:schemeClr val="accent1"/>
+          </a:lnRef>
+          <a:fillRef idx="3">
+            <a:schemeClr val="accent1"/>
+          </a:fillRef>
+          <a:effectRef idx="2">
+            <a:schemeClr val="accent1"/>
+          </a:effectRef>
+          <a:fontRef idx="minor">
+            <a:schemeClr val="lt1"/>
+          </a:fontRef>
+        </p:style>
+        <p:txBody>
+          <a:bodyPr rtlCol="0" anchor="ctr"/>
+          <a:lstStyle/>
+          <a:p>
+            <a:pPr algn="ctr"/>
+          </a:p>
+        </p:txBody>
+      </p:sp>
+      <p:sp>
+        <p:nvSpPr>
+          <p:cNvPr id="4" name="TextBox 3"/>
+          <p:cNvSpPr txBox="1"/>
+          <p:nvPr/>
+        </p:nvSpPr>
+        <p:spPr>
+          <a:xfrm>
+            <a:off x="365760" y="164592"/>
+            <a:ext cx="8412480" cy="256032"/>
+          </a:xfrm>
+          <a:prstGeom prst="rect">
+            <a:avLst/>
+          </a:prstGeom>
+          <a:noFill/>
+        </p:spPr>
+        <p:txBody>
+          <a:bodyPr wrap="square">
+            <a:spAutoFit/>
+          </a:bodyPr>
+          <a:lstStyle/>
+          <a:p>
+            <a:pPr algn="l"/>
+            <a:r>
+              <a:rPr sz="1000" b="0">
+                <a:solidFill>
+                  <a:srgbClr val="B0893E"/>
+                </a:solidFill>
+                <a:latin typeface="Calibri"/>
+              </a:rPr>
+              <a:t>EVIDENCE ROOM — AP AGENT OS   ·   Public record</a:t>
+            </a:r>
+          </a:p>
+        </p:txBody>
+      </p:sp>
+      <p:sp>
+        <p:nvSpPr>
+          <p:cNvPr id="5" name="TextBox 4"/>
+          <p:cNvSpPr txBox="1"/>
+          <p:nvPr/>
+        </p:nvSpPr>
+        <p:spPr>
+          <a:xfrm>
+            <a:off x="365760" y="502920"/>
+            <a:ext cx="8412480" cy="731520"/>
+          </a:xfrm>
+          <a:prstGeom prst="rect">
+            <a:avLst/>
+          </a:prstGeom>
+          <a:noFill/>
+        </p:spPr>
+        <p:txBody>
+          <a:bodyPr wrap="square">
+            <a:spAutoFit/>
+          </a:bodyPr>
+          <a:lstStyle/>
+          <a:p>
+            <a:pPr algn="l"/>
+            <a:r>
+              <a:rPr sz="2600" b="0">
+                <a:solidFill>
+                  <a:srgbClr val="12160F"/>
+                </a:solidFill>
+                <a:latin typeface="Georgia"/>
+              </a:rPr>
+              <a:t>Independent evidence we will cite (and only this)</a:t>
+            </a:r>
+          </a:p>
+        </p:txBody>
+      </p:sp>
+      <p:sp>
+        <p:nvSpPr>
+          <p:cNvPr id="6" name="TextBox 5"/>
+          <p:cNvSpPr txBox="1"/>
+          <p:nvPr/>
+        </p:nvSpPr>
+        <p:spPr>
+          <a:xfrm>
+            <a:off x="365760" y="1371600"/>
+            <a:ext cx="8321040" cy="4937760"/>
+          </a:xfrm>
+          <a:prstGeom prst="rect">
+            <a:avLst/>
+          </a:prstGeom>
+          <a:noFill/>
+        </p:spPr>
+        <p:txBody>
+          <a:bodyPr wrap="square">
+            <a:spAutoFit/>
+          </a:bodyPr>
+          <a:lstStyle/>
+          <a:p>
+            <a:pPr>
+              <a:spcAft>
+                <a:spcPts val="800"/>
+              </a:spcAft>
+            </a:pPr>
+            <a:r>
+              <a:rPr sz="1600">
+                <a:solidFill>
+                  <a:srgbClr val="12160F"/>
+                </a:solidFill>
+                <a:latin typeface="Calibri"/>
+              </a:rPr>
+              <a:t>·  McKinsey State of AI 2025 (n=1,993): 88% use AI in at least one function.</a:t>
+            </a:r>
+          </a:p>
+          <a:p>
+            <a:pPr>
+              <a:spcAft>
+                <a:spcPts val="800"/>
+              </a:spcAft>
+            </a:pPr>
+            <a:r>
+              <a:rPr sz="1600">
+                <a:solidFill>
+                  <a:srgbClr val="12160F"/>
+                </a:solidFill>
+                <a:latin typeface="Calibri"/>
+              </a:rPr>
+              <a:t>·  Nearly two-thirds have not begun scaling across the enterprise.</a:t>
+            </a:r>
+          </a:p>
+          <a:p>
+            <a:pPr>
+              <a:spcAft>
+                <a:spcPts val="800"/>
+              </a:spcAft>
+            </a:pPr>
+            <a:r>
+              <a:rPr sz="1600">
+                <a:solidFill>
+                  <a:srgbClr val="12160F"/>
+                </a:solidFill>
+                <a:latin typeface="Calibri"/>
+              </a:rPr>
+              <a:t>·  62% at least experiment with agents; 23% scale an agent somewhere.</a:t>
+            </a:r>
+          </a:p>
+          <a:p>
+            <a:pPr>
+              <a:spcAft>
+                <a:spcPts val="800"/>
+              </a:spcAft>
+            </a:pPr>
+            <a:r>
+              <a:rPr sz="1600">
+                <a:solidFill>
+                  <a:srgbClr val="12160F"/>
+                </a:solidFill>
+                <a:latin typeface="Calibri"/>
+              </a:rPr>
+              <a:t>·  High performers redesign workflows. That is the work.</a:t>
+            </a:r>
+          </a:p>
+          <a:p>
+            <a:pPr>
+              <a:spcAft>
+                <a:spcPts val="800"/>
+              </a:spcAft>
+            </a:pPr>
+            <a:r>
+              <a:rPr sz="1600">
+                <a:solidFill>
+                  <a:srgbClr val="12160F"/>
+                </a:solidFill>
+                <a:latin typeface="Calibri"/>
+              </a:rPr>
+              <a:t>·  Ardent cost-per-invoice figures are vendor-citing-independent. Do not paste them as targets.</a:t>
+            </a:r>
+          </a:p>
+        </p:txBody>
+      </p:sp>
+    </p:spTree>
+  </p:cSld>
+  <p:clrMapOvr>
+    <a:masterClrMapping/>
+  </p:clrMapOvr>
+</p:sld>
+</file>
+
+<file path=ppt/slides/slide8.xml><?xml version="1.0" encoding="utf-8"?>
+<p:sld xmlns:a="http://schemas.openxmlformats.org/drawingml/2006/main" xmlns:p="http://schemas.openxmlformats.org/presentationml/2006/main" xmlns:r="http://schemas.openxmlformats.org/officeDocument/2006/relationships">
+  <p:cSld>
+    <p:spTree>
+      <p:nvGrpSpPr>
+        <p:cNvPr id="1" name=""/>
+        <p:cNvGrpSpPr/>
+        <p:nvPr/>
+      </p:nvGrpSpPr>
+      <p:grpSpPr/>
+      <p:sp>
+        <p:nvSpPr>
+          <p:cNvPr id="2" name="Rectangle 1"/>
+          <p:cNvSpPr/>
+          <p:nvPr/>
+        </p:nvSpPr>
+        <p:spPr>
+          <a:xfrm>
+            <a:off x="0" y="0"/>
+            <a:ext cx="9144000" cy="6858000"/>
+          </a:xfrm>
+          <a:prstGeom prst="rect">
+            <a:avLst/>
+          </a:prstGeom>
+          <a:solidFill>
+            <a:srgbClr val="F3EEE4"/>
+          </a:solidFill>
+          <a:ln>
+            <a:noFill/>
+          </a:ln>
+        </p:spPr>
+        <p:style>
+          <a:lnRef idx="1">
+            <a:schemeClr val="accent1"/>
+          </a:lnRef>
+          <a:fillRef idx="3">
+            <a:schemeClr val="accent1"/>
+          </a:fillRef>
+          <a:effectRef idx="2">
+            <a:schemeClr val="accent1"/>
+          </a:effectRef>
+          <a:fontRef idx="minor">
+            <a:schemeClr val="lt1"/>
+          </a:fontRef>
+        </p:style>
+        <p:txBody>
+          <a:bodyPr rtlCol="0" anchor="ctr"/>
+          <a:lstStyle/>
+          <a:p>
+            <a:pPr algn="ctr"/>
+          </a:p>
+        </p:txBody>
+      </p:sp>
+      <p:sp>
+        <p:nvSpPr>
+          <p:cNvPr id="3" name="Rectangle 2"/>
+          <p:cNvSpPr/>
+          <p:nvPr/>
+        </p:nvSpPr>
+        <p:spPr>
+          <a:xfrm>
+            <a:off x="0" y="0"/>
+            <a:ext cx="73152" cy="6858000"/>
+          </a:xfrm>
+          <a:prstGeom prst="rect">
+            <a:avLst/>
+          </a:prstGeom>
+          <a:solidFill>
+            <a:srgbClr val="B0893E"/>
+          </a:solidFill>
+          <a:ln>
+            <a:noFill/>
+          </a:ln>
+        </p:spPr>
+        <p:style>
+          <a:lnRef idx="1">
+            <a:schemeClr val="accent1"/>
+          </a:lnRef>
+          <a:fillRef idx="3">
+            <a:schemeClr val="accent1"/>
+          </a:fillRef>
+          <a:effectRef idx="2">
+            <a:schemeClr val="accent1"/>
+          </a:effectRef>
+          <a:fontRef idx="minor">
+            <a:schemeClr val="lt1"/>
+          </a:fontRef>
+        </p:style>
+        <p:txBody>
+          <a:bodyPr rtlCol="0" anchor="ctr"/>
+          <a:lstStyle/>
+          <a:p>
+            <a:pPr algn="ctr"/>
+          </a:p>
+        </p:txBody>
+      </p:sp>
+      <p:sp>
+        <p:nvSpPr>
+          <p:cNvPr id="4" name="TextBox 3"/>
+          <p:cNvSpPr txBox="1"/>
+          <p:nvPr/>
+        </p:nvSpPr>
+        <p:spPr>
+          <a:xfrm>
+            <a:off x="365760" y="164592"/>
+            <a:ext cx="8412480" cy="256032"/>
+          </a:xfrm>
+          <a:prstGeom prst="rect">
+            <a:avLst/>
+          </a:prstGeom>
+          <a:noFill/>
+        </p:spPr>
+        <p:txBody>
+          <a:bodyPr wrap="square">
+            <a:spAutoFit/>
+          </a:bodyPr>
+          <a:lstStyle/>
+          <a:p>
+            <a:pPr algn="l"/>
+            <a:r>
+              <a:rPr sz="1000" b="0">
+                <a:solidFill>
+                  <a:srgbClr val="B0893E"/>
+                </a:solidFill>
+                <a:latin typeface="Calibri"/>
+              </a:rPr>
+              <a:t>EVIDENCE ROOM — AP AGENT OS   ·   Controls</a:t>
+            </a:r>
+          </a:p>
+        </p:txBody>
+      </p:sp>
+      <p:sp>
+        <p:nvSpPr>
+          <p:cNvPr id="5" name="TextBox 4"/>
+          <p:cNvSpPr txBox="1"/>
+          <p:nvPr/>
+        </p:nvSpPr>
+        <p:spPr>
+          <a:xfrm>
+            <a:off x="365760" y="502920"/>
+            <a:ext cx="8412480" cy="731520"/>
+          </a:xfrm>
+          <a:prstGeom prst="rect">
+            <a:avLst/>
+          </a:prstGeom>
+          <a:noFill/>
+        </p:spPr>
+        <p:txBody>
+          <a:bodyPr wrap="square">
+            <a:spAutoFit/>
+          </a:bodyPr>
+          <a:lstStyle/>
+          <a:p>
+            <a:pPr algn="l"/>
+            <a:r>
+              <a:rPr sz="2600" b="0">
+                <a:solidFill>
+                  <a:srgbClr val="12160F"/>
+                </a:solidFill>
+                <a:latin typeface="Georgia"/>
+              </a:rPr>
+              <a:t>What Internal Audit should be able to sample</a:t>
+            </a:r>
+          </a:p>
+        </p:txBody>
+      </p:sp>
+      <p:sp>
+        <p:nvSpPr>
+          <p:cNvPr id="6" name="TextBox 5"/>
+          <p:cNvSpPr txBox="1"/>
+          <p:nvPr/>
+        </p:nvSpPr>
+        <p:spPr>
+          <a:xfrm>
+            <a:off x="365760" y="1371600"/>
+            <a:ext cx="8321040" cy="4937760"/>
+          </a:xfrm>
+          <a:prstGeom prst="rect">
+            <a:avLst/>
+          </a:prstGeom>
+          <a:noFill/>
+        </p:spPr>
+        <p:txBody>
+          <a:bodyPr wrap="square">
+            <a:spAutoFit/>
+          </a:bodyPr>
+          <a:lstStyle/>
+          <a:p>
+            <a:pPr>
+              <a:spcAft>
+                <a:spcPts val="800"/>
+              </a:spcAft>
+            </a:pPr>
+            <a:r>
+              <a:rPr sz="1600">
+                <a:solidFill>
+                  <a:srgbClr val="12160F"/>
+                </a:solidFill>
+                <a:latin typeface="Calibri"/>
+              </a:rPr>
+              <a:t>·  Charter, autonomy register, and limit table for every live helper.</a:t>
+            </a:r>
+          </a:p>
+          <a:p>
+            <a:pPr>
+              <a:spcAft>
+                <a:spcPts val="800"/>
+              </a:spcAft>
+            </a:pPr>
+            <a:r>
+              <a:rPr sz="1600">
+                <a:solidFill>
+                  <a:srgbClr val="12160F"/>
+                </a:solidFill>
+                <a:latin typeface="Calibri"/>
+              </a:rPr>
+              <a:t>·  Packet: source, extract, match worksheet or coded fail, owner, SLA, flag outcome.</a:t>
+            </a:r>
+          </a:p>
+          <a:p>
+            <a:pPr>
+              <a:spcAft>
+                <a:spcPts val="800"/>
+              </a:spcAft>
+            </a:pPr>
+            <a:r>
+              <a:rPr sz="1600">
+                <a:solidFill>
+                  <a:srgbClr val="12160F"/>
+                </a:solidFill>
+                <a:latin typeface="Calibri"/>
+              </a:rPr>
+              <a:t>·  Overrides logged. Promotions change-controlled. One-hour rollback named.</a:t>
+            </a:r>
+          </a:p>
+          <a:p>
+            <a:pPr>
+              <a:spcAft>
+                <a:spcPts val="800"/>
+              </a:spcAft>
+            </a:pPr>
+            <a:r>
+              <a:rPr sz="1600">
+                <a:solidFill>
+                  <a:srgbClr val="12160F"/>
+                </a:solidFill>
+                <a:latin typeface="Calibri"/>
+              </a:rPr>
+              <a:t>·  Dual humans on payment release. Vendor-bank change control exists.</a:t>
+            </a:r>
+          </a:p>
+          <a:p>
+            <a:pPr>
+              <a:spcAft>
+                <a:spcPts val="800"/>
+              </a:spcAft>
+            </a:pPr>
+            <a:r>
+              <a:rPr sz="1600">
+                <a:solidFill>
+                  <a:srgbClr val="12160F"/>
+                </a:solidFill>
+                <a:latin typeface="Calibri"/>
+              </a:rPr>
+              <a:t>·  Cost of inference vs correct outcomes — not tokens as a vanity metric.</a:t>
+            </a:r>
+          </a:p>
+        </p:txBody>
+      </p:sp>
+    </p:spTree>
+  </p:cSld>
+  <p:clrMapOvr>
+    <a:masterClrMapping/>
+  </p:clrMapOvr>
+</p:sld>
+</file>
+
+<file path=ppt/slides/slide9.xml><?xml version="1.0" encoding="utf-8"?>
+<p:sld xmlns:a="http://schemas.openxmlformats.org/drawingml/2006/main" xmlns:p="http://schemas.openxmlformats.org/presentationml/2006/main" xmlns:r="http://schemas.openxmlformats.org/officeDocument/2006/relationships">
+  <p:cSld>
+    <p:spTree>
+      <p:nvGrpSpPr>
+        <p:cNvPr id="1" name=""/>
+        <p:cNvGrpSpPr/>
+        <p:nvPr/>
+      </p:nvGrpSpPr>
+      <p:grpSpPr/>
+      <p:sp>
+        <p:nvSpPr>
+          <p:cNvPr id="2" name="Rectangle 1"/>
+          <p:cNvSpPr/>
+          <p:nvPr/>
+        </p:nvSpPr>
+        <p:spPr>
+          <a:xfrm>
+            <a:off x="0" y="0"/>
+            <a:ext cx="9144000" cy="6858000"/>
+          </a:xfrm>
+          <a:prstGeom prst="rect">
+            <a:avLst/>
+          </a:prstGeom>
+          <a:solidFill>
+            <a:srgbClr val="F3EEE4"/>
+          </a:solidFill>
+          <a:ln>
+            <a:noFill/>
+          </a:ln>
+        </p:spPr>
+        <p:style>
+          <a:lnRef idx="1">
+            <a:schemeClr val="accent1"/>
+          </a:lnRef>
+          <a:fillRef idx="3">
+            <a:schemeClr val="accent1"/>
+          </a:fillRef>
+          <a:effectRef idx="2">
+            <a:schemeClr val="accent1"/>
+          </a:effectRef>
+          <a:fontRef idx="minor">
+            <a:schemeClr val="lt1"/>
+          </a:fontRef>
+        </p:style>
+        <p:txBody>
+          <a:bodyPr rtlCol="0" anchor="ctr"/>
+          <a:lstStyle/>
+          <a:p>
+            <a:pPr algn="ctr"/>
+          </a:p>
+        </p:txBody>
+      </p:sp>
+      <p:sp>
+        <p:nvSpPr>
+          <p:cNvPr id="3" name="Rectangle 2"/>
+          <p:cNvSpPr/>
+          <p:nvPr/>
+        </p:nvSpPr>
+        <p:spPr>
+          <a:xfrm>
+            <a:off x="0" y="0"/>
+            <a:ext cx="73152" cy="6858000"/>
+          </a:xfrm>
+          <a:prstGeom prst="rect">
+            <a:avLst/>
+          </a:prstGeom>
+          <a:solidFill>
+            <a:srgbClr val="B0893E"/>
+          </a:solidFill>
+          <a:ln>
+            <a:noFill/>
+          </a:ln>
+        </p:spPr>
+        <p:style>
+          <a:lnRef idx="1">
+            <a:schemeClr val="accent1"/>
+          </a:lnRef>
+          <a:fillRef idx="3">
+            <a:schemeClr val="accent1"/>
+          </a:fillRef>
+          <a:effectRef idx="2">
+            <a:schemeClr val="accent1"/>
+          </a:effectRef>
+          <a:fontRef idx="minor">
+            <a:schemeClr val="lt1"/>
+          </a:fontRef>
+        </p:style>
+        <p:txBody>
+          <a:bodyPr rtlCol="0" anchor="ctr"/>
+          <a:lstStyle/>
+          <a:p>
+            <a:pPr algn="ctr"/>
+          </a:p>
+        </p:txBody>
+      </p:sp>
+      <p:sp>
+        <p:nvSpPr>
+          <p:cNvPr id="4" name="TextBox 3"/>
+          <p:cNvSpPr txBox="1"/>
+          <p:nvPr/>
+        </p:nvSpPr>
+        <p:spPr>
+          <a:xfrm>
+            <a:off x="365760" y="164592"/>
+            <a:ext cx="8412480" cy="256032"/>
+          </a:xfrm>
+          <a:prstGeom prst="rect">
+            <a:avLst/>
+          </a:prstGeom>
+          <a:noFill/>
+        </p:spPr>
+        <p:txBody>
+          <a:bodyPr wrap="square">
+            <a:spAutoFit/>
+          </a:bodyPr>
+          <a:lstStyle/>
+          <a:p>
+            <a:pPr algn="l"/>
+            <a:r>
+              <a:rPr sz="1000" b="0">
+                <a:solidFill>
+                  <a:srgbClr val="B0893E"/>
+                </a:solidFill>
+                <a:latin typeface="Calibri"/>
+              </a:rPr>
+              <a:t>EVIDENCE ROOM — AP AGENT OS   ·   Economics</a:t>
+            </a:r>
+          </a:p>
+        </p:txBody>
+      </p:sp>
+      <p:sp>
+        <p:nvSpPr>
+          <p:cNvPr id="5" name="TextBox 4"/>
+          <p:cNvSpPr txBox="1"/>
+          <p:nvPr/>
+        </p:nvSpPr>
+        <p:spPr>
+          <a:xfrm>
+            <a:off x="365760" y="502920"/>
+            <a:ext cx="8412480" cy="731520"/>
+          </a:xfrm>
+          <a:prstGeom prst="rect">
+            <a:avLst/>
+          </a:prstGeom>
+          <a:noFill/>
+        </p:spPr>
+        <p:txBody>
+          <a:bodyPr wrap="square">
+            <a:spAutoFit/>
+          </a:bodyPr>
+          <a:lstStyle/>
+          <a:p>
+            <a:pPr algn="l"/>
+            <a:r>
+              <a:rPr sz="2600" b="0">
+                <a:solidFill>
+                  <a:srgbClr val="12160F"/>
+                </a:solidFill>
+                <a:latin typeface="Georgia"/>
+              </a:rPr>
+              <a:t>How we talk about money</a:t>
+            </a:r>
+          </a:p>
+        </p:txBody>
+      </p:sp>
+      <p:sp>
+        <p:nvSpPr>
+          <p:cNvPr id="6" name="TextBox 5"/>
+          <p:cNvSpPr txBox="1"/>
+          <p:nvPr/>
+        </p:nvSpPr>
+        <p:spPr>
+          <a:xfrm>
+            <a:off x="365760" y="1371600"/>
+            <a:ext cx="8321040" cy="4937760"/>
+          </a:xfrm>
+          <a:prstGeom prst="rect">
+            <a:avLst/>
+          </a:prstGeom>
+          <a:noFill/>
+        </p:spPr>
+        <p:txBody>
+          <a:bodyPr wrap="square">
+            <a:spAutoFit/>
+          </a:bodyPr>
+          <a:lstStyle/>
+          <a:p>
+            <a:pPr>
+              <a:spcAft>
+                <a:spcPts val="800"/>
+              </a:spcAft>
+            </a:pPr>
+            <a:r>
+              <a:rPr sz="1600">
+                <a:solidFill>
+                  <a:srgbClr val="12160F"/>
+                </a:solidFill>
+                <a:latin typeface="Calibri"/>
+              </a:rPr>
+              <a:t>·  The workbook does arithmetic on your inputs. It is not a forecast.</a:t>
+            </a:r>
+          </a:p>
+          <a:p>
+            <a:pPr>
+              <a:spcAft>
+                <a:spcPts val="800"/>
+              </a:spcAft>
+            </a:pPr>
+            <a:r>
+              <a:rPr sz="1600">
+                <a:solidFill>
+                  <a:srgbClr val="12160F"/>
+                </a:solidFill>
+                <a:latin typeface="Calibri"/>
+              </a:rPr>
+              <a:t>·  Duplicate-suspect lines do not create savings.</a:t>
+            </a:r>
+          </a:p>
+          <a:p>
+            <a:pPr>
+              <a:spcAft>
+                <a:spcPts val="800"/>
+              </a:spcAft>
+            </a:pPr>
+            <a:r>
+              <a:rPr sz="1600">
+                <a:solidFill>
+                  <a:srgbClr val="12160F"/>
+                </a:solidFill>
+                <a:latin typeface="Calibri"/>
+              </a:rPr>
+              <a:t>·  Leave unknowns blank. Do not replace them with industry averages.</a:t>
+            </a:r>
+          </a:p>
+          <a:p>
+            <a:pPr>
+              <a:spcAft>
+                <a:spcPts val="800"/>
+              </a:spcAft>
+            </a:pPr>
+            <a:r>
+              <a:rPr sz="1600">
+                <a:solidFill>
+                  <a:srgbClr val="12160F"/>
+                </a:solidFill>
+                <a:latin typeface="Calibri"/>
+              </a:rPr>
+              <a:t>·  Validated savings require a Finance attestation method.</a:t>
+            </a:r>
+          </a:p>
+          <a:p>
+            <a:pPr>
+              <a:spcAft>
+                <a:spcPts val="800"/>
+              </a:spcAft>
+            </a:pPr>
+            <a:r>
+              <a:rPr sz="1600">
+                <a:solidFill>
+                  <a:srgbClr val="12160F"/>
+                </a:solidFill>
+                <a:latin typeface="Calibri"/>
+              </a:rPr>
+              <a:t>·  Conservative / Base / Upside are envelopes, not commitments.</a:t>
             </a:r>
           </a:p>
         </p:txBody>
